--- a/docs/monografia/BANNER - ÚLTIMA VERSÃO.pptx
+++ b/docs/monografia/BANNER - ÚLTIMA VERSÃO.pptx
@@ -6599,15 +6599,7 @@
             </a:pPr>
             <a:r>
               <a:rPr lang="pt-BR" sz="3200" dirty="0"/>
-              <a:t>	No contexto atual da Publicidade e Propaganda, as estratégias colaborativas (</a:t>
-            </a:r>
-            <a:r>
-              <a:rPr lang="pt-BR" sz="3200" dirty="0" err="1"/>
-              <a:t>Collabs</a:t>
-            </a:r>
-            <a:r>
-              <a:rPr lang="pt-BR" sz="3200" dirty="0"/>
-              <a:t>) se consolidam como ferramentas eficazes para gerar inovação e relevância. </a:t>
+              <a:t>	Instituições de ensino brasileiras costumam depender de múltiplos sistemas isolados para tarefas interdependentes, como diário de classe, comunicados aos responsáveis e controle de tarefas e provas. Essa fragmentação dificulta o acompanhamento integrado do desempenho e da rotina escolar.</a:t>
             </a:r>
           </a:p>
           <a:p>
@@ -6618,15 +6610,7 @@
             </a:pPr>
             <a:r>
               <a:rPr lang="pt-BR" sz="3200" dirty="0"/>
-              <a:t>	Segundo </a:t>
-            </a:r>
-            <a:r>
-              <a:rPr lang="pt-BR" sz="3200" dirty="0" err="1"/>
-              <a:t>Cusatis</a:t>
-            </a:r>
-            <a:r>
-              <a:rPr lang="pt-BR" sz="3200" dirty="0"/>
-              <a:t> (2024) “quando uma marca estabelece estratégias inteligentes, engaja os consumidores por meio de múltiplos sentidos e se adapta rapidamente às mudanças, ela não só fortalece sua presença no mercado como também constrói uma narrativa convincente e uma identidade duradoura”. </a:t>
+              <a:t>	Soluções já consolidadas, como Google Classroom e Moodle, cobrem parcialmente a organização de atividades, mas concentram-se pouco na comunicação institucional em tempo real e não oferecem apoio personalizado ao estudo.</a:t>
             </a:r>
           </a:p>
           <a:p>
@@ -6637,46 +6621,7 @@
             </a:pPr>
             <a:r>
               <a:rPr lang="pt-BR" sz="3200" dirty="0"/>
-              <a:t>	As </a:t>
-            </a:r>
-            <a:r>
-              <a:rPr lang="pt-BR" sz="3200" dirty="0" err="1"/>
-              <a:t>collabs</a:t>
-            </a:r>
-            <a:r>
-              <a:rPr lang="pt-BR" sz="3200" dirty="0"/>
-              <a:t> ampliam o alcance da comunicação, permitem apresentar as empresas a novos públicos e criam experiências memoráveis, o que contribui para maior engajamento, fidelização e possibilitam ações promocionais.	Entre as marcas que mais utilizam a estratégia de </a:t>
-            </a:r>
-            <a:r>
-              <a:rPr lang="pt-BR" sz="3200" i="1" dirty="0" err="1"/>
-              <a:t>Collab</a:t>
-            </a:r>
-            <a:r>
-              <a:rPr lang="pt-BR" sz="3200" dirty="0"/>
-              <a:t> está o Burger King, Bauducco e Coca-Cola, com colaborações notáveis envolvendo influenciadores e empresas, segundo a pesquisa da revista Exame. (Pio, 2025).</a:t>
-            </a:r>
-          </a:p>
-          <a:p>
-            <a:pPr algn="just">
-              <a:lnSpc>
-                <a:spcPct val="150000"/>
-              </a:lnSpc>
-            </a:pPr>
-            <a:r>
-              <a:rPr lang="pt-BR" sz="3200" dirty="0"/>
-              <a:t>	O objetivo deste trabalho é apresentar como a estratégia de colaboração entre marcas (</a:t>
-            </a:r>
-            <a:r>
-              <a:rPr lang="pt-BR" sz="3200" i="1" dirty="0" err="1"/>
-              <a:t>Collab</a:t>
-            </a:r>
-            <a:r>
-              <a:rPr lang="pt-BR" sz="3200" i="1" dirty="0"/>
-              <a:t>)</a:t>
-            </a:r>
-            <a:r>
-              <a:rPr lang="pt-BR" sz="3200" dirty="0"/>
-              <a:t> pode potencializar as vendas e ajudar captar novos públicos, além de demonstrar o valor resultante entre as dessa colaboração. </a:t>
+              <a:t>	O objetivo deste trabalho é apresentar o desenvolvimento do Ecossistema Escolar, uma plataforma digital que integra gestão acadêmica, comunicação institucional em tempo real e recursos de inteligência artificial generativa para apoio ao estudo.</a:t>
             </a:r>
           </a:p>
         </p:txBody>
@@ -6874,7 +6819,7 @@
         </p:nvSpPr>
         <p:spPr bwMode="auto">
           <a:xfrm>
-            <a:off x="16719738" y="32574579"/>
+            <a:off x="16719738" y="24074579"/>
             <a:ext cx="14693210" cy="808037"/>
           </a:xfrm>
           <a:prstGeom prst="rect">
@@ -6935,7 +6880,7 @@
         </p:nvSpPr>
         <p:spPr bwMode="auto">
           <a:xfrm>
-            <a:off x="16693615" y="33421649"/>
+            <a:off x="16693615" y="24921649"/>
             <a:ext cx="14693211" cy="3694379"/>
           </a:xfrm>
           <a:prstGeom prst="rect">
@@ -6960,7 +6905,7 @@
             </a:pPr>
             <a:r>
               <a:rPr lang="pt-BR" sz="3200" dirty="0"/>
-              <a:t>	Conclui-se que, quando bem planejadas e alinhadas a elementos criativos e de representatividade, as colaborações entre marcas configuram-se como uma estratégia promissora, contribuindo não apenas para atrair novos públicos, mas também para consolidar a identidade das empresas diante de um ambiente competitivo em constante transformação.</a:t>
+              <a:t>	O sistema desenvolvido atende ao problema de fragmentação identificado, integrando organização acadêmica, comunicação escolar e apoio aos estudos em um único ambiente digital. Como trabalhos futuros, recomenda-se a ampliação dos recursos de inteligência artificial e a realização de testes formais de desempenho e usabilidade com os usuários finais.</a:t>
             </a:r>
           </a:p>
         </p:txBody>
@@ -7128,23 +7073,7 @@
             </a:pPr>
             <a:r>
               <a:rPr lang="pt-BR" sz="3200" dirty="0"/>
-              <a:t>	Para obter os resultados e respostas acerca do tema, foram realizadas pesquisas bibliográficas conforme o tema. Utilizou-se também uma pesquisa quantitativa, aplicada de forma aleatória e voluntária com 80 residentes da cidade de São José dos Campos – SP acima de 18 anos, interessados em suplementos e gomas de mascar. A pesquisa foi aplicada através de um formulário online na plataforma </a:t>
-            </a:r>
-            <a:r>
-              <a:rPr lang="pt-BR" sz="3200" i="1" dirty="0"/>
-              <a:t>Google </a:t>
-            </a:r>
-            <a:r>
-              <a:rPr lang="pt-BR" sz="3200" i="1" dirty="0" err="1"/>
-              <a:t>Forms</a:t>
-            </a:r>
-            <a:r>
-              <a:rPr lang="pt-BR" sz="3200" i="1" dirty="0"/>
-              <a:t> e continha</a:t>
-            </a:r>
-            <a:r>
-              <a:rPr lang="pt-BR" sz="3200" dirty="0"/>
-              <a:t> 12 questões, sendo divulgada entre 11 e 22 de agosto de 2025. </a:t>
+              <a:t>	O sistema foi desenvolvido em TypeScript, com back-end em Node.js seguindo o padrão MVC, e banco de dados relacional MySQL. A comunicação em tempo real utiliza WebSocket, e o envio de avisos é feito via Evolution API, integrada ao WhatsApp.</a:t>
             </a:r>
           </a:p>
           <a:p>
@@ -7155,7 +7084,7 @@
             </a:pPr>
             <a:r>
               <a:rPr lang="pt-BR" sz="3200" dirty="0"/>
-              <a:t>	As questões tiveram como objetivo analisar sobre hábitos, preferências e intenções de consumo relacionadas a suplementos e chicletes. O público-alvo contemplou indivíduos</a:t>
+              <a:t>	A segurança e a proteção de dados pessoais foram tratadas como parte da arquitetura: autenticação por JWT, senhas em hash (bcrypt), identificadores não sensíveis (GUID) em vez de CPF, e acesso escopado por escola e função, em diálogo com a LGPD (Lei nº 13.709/2018).</a:t>
             </a:r>
           </a:p>
         </p:txBody>
@@ -7191,7 +7120,7 @@
             <a:pPr algn="ctr"/>
             <a:r>
               <a:rPr lang="pt-BR" sz="4000" b="1" i="1" dirty="0"/>
-              <a:t>Alice de Castro Sene Carvalho, Luiza Florentino Silva, Maria Luiza de Caris Santos, Miguel Pereira Silva, Ana Carolina Marini Figueira dos Santos.</a:t>
+              <a:t>Eduardo Tagliamento Barbosa, Henrique Cruz Dallatorre, Vithor Maximus Borges Queiroz, Alberson Wander Sá dos Santos, Hélio Lourenço Esperidião Ferreira.</a:t>
             </a:r>
             <a:endParaRPr lang="pt-BR" sz="4000" dirty="0"/>
           </a:p>
@@ -7235,15 +7164,7 @@
             <a:pPr algn="ctr" defTabSz="4318000"/>
             <a:r>
               <a:rPr lang="pt-BR" altLang="pt-BR" sz="2800" dirty="0"/>
-              <a:t>Colégio Técnico “Antônio Fernandes Teixeira”, Fundação Vale paraibana de Ensino,  Curso Técnico de Publicidade, Brasil, </a:t>
-            </a:r>
-            <a:r>
-              <a:rPr lang="pt-BR" altLang="pt-BR" sz="2800" dirty="0" err="1"/>
-              <a:t>SJCampos</a:t>
-            </a:r>
-            <a:r>
-              <a:rPr lang="pt-BR" altLang="pt-BR" sz="2800" dirty="0"/>
-              <a:t> – SP, 12245-020</a:t>
+              <a:t>Colégio Técnico Antônio Teixeira Fernandes, Fundação Valeparaibana de Ensino, Curso Técnico em Informática, Brasil, São José dos Campos, SP, 12245-020</a:t>
             </a:r>
           </a:p>
         </p:txBody>
@@ -7258,7 +7179,7 @@
         </p:nvSpPr>
         <p:spPr bwMode="auto">
           <a:xfrm>
-            <a:off x="16719738" y="37433912"/>
+            <a:off x="16719738" y="28933912"/>
             <a:ext cx="14693210" cy="808037"/>
           </a:xfrm>
           <a:prstGeom prst="rect">
@@ -7319,7 +7240,7 @@
         </p:nvSpPr>
         <p:spPr bwMode="auto">
           <a:xfrm>
-            <a:off x="16676111" y="38241949"/>
+            <a:off x="16676111" y="29741949"/>
             <a:ext cx="14736838" cy="4433043"/>
           </a:xfrm>
           <a:prstGeom prst="rect">
@@ -7343,8 +7264,8 @@
               </a:lnSpc>
             </a:pPr>
             <a:r>
-              <a:rPr lang="pt-BR" sz="3200" dirty="0"/>
-              <a:t>CUSATIS, Camila. Branding: estratégia de marca. São Paulo: Editora Senac São Paulo, 2024.  </a:t>
+              <a:rPr lang="pt-BR" sz="4000" dirty="0"/>
+              <a:t>BRASIL. Lei nº 13.709, de 14 de agosto de 2018. Lei Geral de Proteção de Dados Pessoais (LGPD). Diário Oficial da União: seção 1, Brasília, DF, 15 ago. 2018.</a:t>
             </a:r>
           </a:p>
           <a:p>
@@ -7354,16 +7275,19 @@
               </a:lnSpc>
             </a:pPr>
             <a:r>
-              <a:rPr lang="pt-BR" sz="3200" dirty="0"/>
-              <a:t>PIO, Juliana. </a:t>
-            </a:r>
-            <a:r>
-              <a:rPr lang="pt-BR" sz="3200" dirty="0" err="1"/>
-              <a:t>Collabs</a:t>
-            </a:r>
-            <a:r>
-              <a:rPr lang="pt-BR" sz="3200" dirty="0"/>
-              <a:t> de sucesso: estudo mostra fatores que impulsionam parcerias entre marcas no Brasil. Exame, 24 fev. 2025. Disponível em: https://exame.com/marketing/collabs-de-sucesso-estudo-mostra-fatores-que-impulsionam-parcerias-entre-marcas-no-brasil/. Acesso em: 01 ago. 2025.</a:t>
+              <a:rPr lang="pt-BR" sz="4000" dirty="0"/>
+              <a:t>G1. Censo Escolar registra aumento na evasão escolar do Ensino Médio. Jornal Nacional, 22 fev. 2024.</a:t>
+            </a:r>
+          </a:p>
+          <a:p>
+            <a:pPr algn="just">
+              <a:lnSpc>
+                <a:spcPct val="150000"/>
+              </a:lnSpc>
+            </a:pPr>
+            <a:r>
+              <a:rPr lang="pt-BR" sz="4000" dirty="0"/>
+              <a:t>MORAIS, Marcio. Diferenças entre IA Tradicional e IA Generativa (Preditiva). [20--].</a:t>
             </a:r>
           </a:p>
         </p:txBody>
@@ -7391,7 +7315,7 @@
           </a:ln>
         </p:spPr>
         <p:txBody>
-          <a:bodyPr wrap="square" lIns="91415" tIns="45705" rIns="91415" bIns="45705" anchor="ctr">
+          <a:bodyPr wrap="square" lIns="91415" tIns="45705" rIns="91415" bIns="45705" anchor="t">
             <a:spAutoFit/>
           </a:bodyPr>
           <a:lstStyle/>
@@ -7403,36 +7327,8 @@
             </a:pPr>
             <a:r>
               <a:rPr lang="pt-BR" sz="3200" dirty="0"/>
-              <a:t>	A pesquisa com 80 participantes revelou predominância feminina (65%) e maior concentração na faixa etária de 18 a 22 anos (47%). Sobre a estratégia de colaboração entre marcas (</a:t>
-            </a:r>
-            <a:r>
-              <a:rPr lang="pt-BR" sz="3200" dirty="0" err="1"/>
-              <a:t>Collab</a:t>
-            </a:r>
-            <a:r>
-              <a:rPr lang="pt-BR" sz="3200" dirty="0"/>
-              <a:t>), 83% já conheciam o conceito e 70% já consumiram produtos resultantes dessas parcerias. A figura 1, apresenta que 97% acreditam que a </a:t>
-            </a:r>
-            <a:r>
-              <a:rPr lang="pt-BR" sz="3200" dirty="0" err="1"/>
-              <a:t>Collab</a:t>
-            </a:r>
-            <a:r>
-              <a:rPr lang="pt-BR" sz="3200" dirty="0"/>
-              <a:t> aumenta o conhecimento e a visibilidade das marcas. As respostas abertas indicaram que a estratégia ajuda o consumidor a conhecer melhor as marcas, facilita a compra e atrai atenção. Entre os motivos de consumo, destacaram-se curiosidade (30%), já ser cliente das marcas (20%), experiência de compra (18%) e nostalgia (6%).</a:t>
-            </a:r>
-          </a:p>
-          <a:p>
-            <a:pPr algn="just">
-              <a:lnSpc>
-                <a:spcPct val="150000"/>
-              </a:lnSpc>
-            </a:pPr>
-            <a:endParaRPr lang="pt-BR" sz="3200" dirty="0"/>
-          </a:p>
-          <a:p>
-            <a:pPr algn="just"/>
-            <a:endParaRPr lang="pt-BR" sz="3200" dirty="0"/>
+              <a:t>	O desenvolvimento resultou em um sistema funcional que centraliza calendário acadêmico, tarefas, provas, comunicação entre usuários e recomendações de estudo geradas por inteligência artificial (Google Gemini), a partir de conteúdo real cadastrado pelos professores. A validação foi conduzida por meio de testes funcionais manuais e testes de endpoints via Postman, cobrindo os principais fluxos de uso de cada perfil (aluno, professor, coordenação, direção e secretaria).</a:t>
+            </a:r>
           </a:p>
         </p:txBody>
       </p:sp>
@@ -7745,7 +7641,7 @@
           <a:p>
             <a:r>
               <a:rPr lang="pt-BR" sz="6600" b="1" dirty="0"/>
-              <a:t>COLLAB ENTRE MARCAS: UMA ANÁLISE SOBRE CONHECIMENTO E VIABILIDADE DA ESTRATÉGIA NA POTENCIALIZAÇÃO DAS VENDAS</a:t>
+              <a:t>ECOSSISTEMA ESCOLAR: DESENVOLVIMENTO DE UMA PLATAFORMA DIGITAL PARA GESTÃO E COMUNICAÇÃO ACADÊMICA</a:t>
             </a:r>
             <a:br>
               <a:rPr lang="pt-BR" sz="6600" dirty="0"/>
@@ -7843,23 +7739,7 @@
             </a:pPr>
             <a:r>
               <a:rPr lang="pt-BR" sz="3200" dirty="0"/>
-              <a:t>	Após a análise dos resultados, observa-se que a estratégia de colaboração entre marcas (</a:t>
-            </a:r>
-            <a:r>
-              <a:rPr lang="pt-BR" sz="3200" i="1" dirty="0" err="1"/>
-              <a:t>Collab</a:t>
-            </a:r>
-            <a:r>
-              <a:rPr lang="pt-BR" sz="3200" dirty="0"/>
-              <a:t>) é altamente eficaz, sendo valorizada por 97% dos entrevistados, que a consideram uma oportunidade relevante para o intercâmbio de visibilidade e fortalecimento entre as marcas envolvidas. Essa percepção reforça o papel da </a:t>
-            </a:r>
-            <a:r>
-              <a:rPr lang="pt-BR" sz="3200" i="1" dirty="0" err="1"/>
-              <a:t>Collab</a:t>
-            </a:r>
-            <a:r>
-              <a:rPr lang="pt-BR" sz="3200" dirty="0"/>
-              <a:t> como uma ferramenta estratégica capaz de ampliar o reconhecimento no mercado, aumentar o potencial de vendas, estimular a criatividade, expandir as possibilidades de comunicação e fortalecer o engajamento do público — aspectos já apontados na literatura.</a:t>
+              <a:t>	Em relação a soluções já consolidadas, como Google Classroom e Moodle, o Ecossistema Escolar se diferencia por centralizar comunicação instantânea, notificações via WhatsApp e apoio ao estudo por inteligência artificial em uma única plataforma.</a:t>
             </a:r>
           </a:p>
           <a:p>
@@ -7870,30 +7750,7 @@
             </a:pPr>
             <a:r>
               <a:rPr lang="pt-BR" sz="3200" dirty="0"/>
-              <a:t>	O fato de 70% dos entrevistados afirmarem que já consumiram produtos de uma marca em função de uma colaboração, reforça o impacto positivo dessa estratégia na decisão de compra. Muitos consumidores relataram ainda que são motivados a conhecer melhor as marcas a partir dessas ações.</a:t>
-            </a:r>
-          </a:p>
-          <a:p>
-            <a:pPr algn="just">
-              <a:lnSpc>
-                <a:spcPct val="150000"/>
-              </a:lnSpc>
-            </a:pPr>
-            <a:r>
-              <a:rPr lang="pt-BR" sz="3200" dirty="0"/>
-              <a:t>	A curiosidade despertada pelas </a:t>
-            </a:r>
-            <a:r>
-              <a:rPr lang="pt-BR" sz="3200" i="1" dirty="0" err="1"/>
-              <a:t>Collabs</a:t>
-            </a:r>
-            <a:r>
-              <a:rPr lang="pt-BR" sz="3200" i="1" dirty="0"/>
-              <a:t> </a:t>
-            </a:r>
-            <a:r>
-              <a:rPr lang="pt-BR" sz="3200" dirty="0"/>
-              <a:t>foi apontada como o principal fator de atração e decisão de compra. A partir desse interesse inicial, o consumidor passa a reconhecer a marca, o que pode levá-lo a se tornar um cliente recorrente. Assim, é fundamental que as marcas explorem essa curiosidade em suas campanhas, utilizando a criatividade como elemento-chave, Portanto, estimular a curiosidade dos consumidores por meio de colaborações criativas não apenas atrai novos públicos, mas também amplia a visibilidade e o valor percebido das marcas no mercado.</a:t>
+              <a:t>	Embora ainda não possua o mesmo grau de maturidade dessas plataformas, o sistema demonstrou potencial para atender necessidades específicas de instituições que hoje dependem de ferramentas isoladas para comunicação e organização acadêmica.</a:t>
             </a:r>
           </a:p>
         </p:txBody>
@@ -7908,7 +7765,205 @@
         </p:nvSpPr>
         <p:spPr bwMode="auto">
           <a:xfrm>
-            <a:off x="-1103341" y="42126358"/>
+            <a:off x="860741" y="40383330"/>
+            <a:ext cx="14893413" cy="523220"/>
+          </a:xfrm>
+          <a:prstGeom prst="rect">
+            <a:avLst/>
+          </a:prstGeom>
+          <a:noFill/>
+          <a:ln>
+            <a:noFill/>
+          </a:ln>
+          <a:effectLst/>
+          <a:extLst>
+            <a:ext uri="{909E8E84-426E-40DD-AFC4-6F175D3DCCD1}">
+              <a14:hiddenFill xmlns:a14="http://schemas.microsoft.com/office/drawing/2010/main">
+                <a:solidFill>
+                  <a:schemeClr val="accent1"/>
+                </a:solidFill>
+              </a14:hiddenFill>
+            </a:ext>
+            <a:ext uri="{91240B29-F687-4F45-9708-019B960494DF}">
+              <a14:hiddenLine xmlns:a14="http://schemas.microsoft.com/office/drawing/2010/main" w="9525">
+                <a:solidFill>
+                  <a:schemeClr val="tx1"/>
+                </a:solidFill>
+                <a:miter lim="800000"/>
+                <a:headEnd/>
+                <a:tailEnd/>
+              </a14:hiddenLine>
+            </a:ext>
+            <a:ext uri="{AF507438-7753-43E0-B8FC-AC1667EBCBE1}">
+              <a14:hiddenEffects xmlns:a14="http://schemas.microsoft.com/office/drawing/2010/main">
+                <a:effectLst>
+                  <a:outerShdw dist="35921" dir="2700000" algn="ctr" rotWithShape="0">
+                    <a:schemeClr val="bg2"/>
+                  </a:outerShdw>
+                </a:effectLst>
+              </a14:hiddenEffects>
+            </a:ext>
+          </a:extLst>
+        </p:spPr>
+        <p:txBody>
+          <a:bodyPr vert="horz" wrap="square" lIns="91440" tIns="45720" rIns="91440" bIns="45720" numCol="1" anchor="ctr" anchorCtr="0" compatLnSpc="1">
+            <a:spAutoFit/>
+          </a:bodyPr>
+          <a:lstStyle/>
+          <a:p>
+            <a:pPr marL="0" marR="0" lvl="0" indent="180975" algn="ctr" defTabSz="914400" rtl="0" eaLnBrk="0" fontAlgn="base" latinLnBrk="0" hangingPunct="0">
+              <a:lnSpc>
+                <a:spcPct val="100000"/>
+              </a:lnSpc>
+              <a:spcBef>
+                <a:spcPct val="0"/>
+              </a:spcBef>
+              <a:spcAft>
+                <a:spcPct val="0"/>
+              </a:spcAft>
+              <a:buClrTx/>
+              <a:buSzTx/>
+              <a:buFontTx/>
+              <a:buNone/>
+            </a:pPr>
+            <a:r>
+              <a:rPr kumimoji="0" lang="pt-BR" altLang="pt-BR" sz="2800" b="0" i="0" u="none" strike="noStrike" cap="none" normalizeH="0" baseline="0" dirty="0">
+                <a:ln>
+                  <a:noFill/>
+                </a:ln>
+                <a:solidFill>
+                  <a:schemeClr val="tx1"/>
+                </a:solidFill>
+                <a:effectLst/>
+                <a:latin typeface="Arial" panose="020B0604020202020204" pitchFamily="34" charset="0"/>
+                <a:ea typeface="Times New Roman" panose="02020603050405020304" pitchFamily="18" charset="0"/>
+                <a:cs typeface="Arial" panose="020B0604020202020204" pitchFamily="34" charset="0"/>
+              </a:rPr>
+              <a:t>Fonte: Autores (2026).</a:t>
+            </a:r>
+            <a:endParaRPr kumimoji="0" lang="pt-BR" altLang="pt-BR" sz="2800" b="0" i="0" u="none" strike="noStrike" cap="none" normalizeH="0" baseline="0" dirty="0">
+              <a:ln>
+                <a:noFill/>
+              </a:ln>
+              <a:solidFill>
+                <a:schemeClr val="tx1"/>
+              </a:solidFill>
+              <a:effectLst/>
+              <a:latin typeface="Arial" panose="020B0604020202020204" pitchFamily="34" charset="0"/>
+            </a:endParaRPr>
+          </a:p>
+        </p:txBody>
+      </p:sp>
+      <p:sp>
+        <p:nvSpPr>
+          <p:cNvPr id="16" name="CaixaDeTexto 15"/>
+          <p:cNvSpPr txBox="1"/>
+          <p:nvPr/>
+        </p:nvSpPr>
+        <p:spPr>
+          <a:xfrm>
+            <a:off x="860741" y="33960000"/>
+            <a:ext cx="5326504" cy="923330"/>
+          </a:xfrm>
+          <a:prstGeom prst="rect">
+            <a:avLst/>
+          </a:prstGeom>
+          <a:noFill/>
+        </p:spPr>
+        <p:txBody>
+          <a:bodyPr wrap="square" rtlCol="0">
+            <a:spAutoFit/>
+          </a:bodyPr>
+          <a:lstStyle/>
+          <a:p>
+            <a:pPr algn="ctr"/>
+            <a:r>
+              <a:rPr lang="pt-BR" sz="2700" dirty="0"/>
+              <a:t>Figura 1 - Recomendação de estudo por IA.</a:t>
+            </a:r>
+          </a:p>
+        </p:txBody>
+      </p:sp>
+      <p:sp>
+        <p:nvSpPr>
+          <p:cNvPr id="16" name="CaixaDeTexto 15"/>
+          <p:cNvSpPr txBox="1"/>
+          <p:nvPr/>
+        </p:nvSpPr>
+        <p:spPr>
+          <a:xfrm>
+            <a:off x="6437245" y="33960000"/>
+            <a:ext cx="9316909" cy="923330"/>
+          </a:xfrm>
+          <a:prstGeom prst="rect">
+            <a:avLst/>
+          </a:prstGeom>
+          <a:noFill/>
+        </p:spPr>
+        <p:txBody>
+          <a:bodyPr wrap="square" rtlCol="0">
+            <a:spAutoFit/>
+          </a:bodyPr>
+          <a:lstStyle/>
+          <a:p>
+            <a:pPr algn="ctr"/>
+            <a:r>
+              <a:rPr lang="pt-BR" sz="2700" dirty="0"/>
+              <a:t>Figura 3 - Arquitetura dos agentes de inteligência artificial.</a:t>
+            </a:r>
+          </a:p>
+        </p:txBody>
+      </p:sp>
+      <p:sp>
+        <p:nvSpPr>
+          <p:cNvPr id="8" name="Caixa de Texto 7"/>
+          <p:cNvSpPr txBox="1"/>
+          <p:nvPr/>
+        </p:nvSpPr>
+        <p:spPr>
+          <a:xfrm>
+            <a:off x="17064163" y="7200000"/>
+            <a:ext cx="10657184" cy="507831"/>
+          </a:xfrm>
+          <a:prstGeom prst="rect">
+            <a:avLst/>
+          </a:prstGeom>
+        </p:spPr>
+        <p:txBody>
+          <a:bodyPr wrap="square">
+            <a:spAutoFit/>
+          </a:bodyPr>
+          <a:lstStyle/>
+          <a:p>
+            <a:pPr marL="0" indent="0" algn="ctr" defTabSz="266700">
+              <a:spcBef>
+                <a:spcPct val="0"/>
+              </a:spcBef>
+              <a:spcAft>
+                <a:spcPct val="0"/>
+              </a:spcAft>
+            </a:pPr>
+            <a:r>
+              <a:rPr sz="2700" dirty="0" err="1">
+                <a:latin typeface="Arial" panose="020B0604020202020204"/>
+                <a:ea typeface="Times New Roman" panose="02020603050405020304"/>
+              </a:rPr>
+              <a:t>Figura 2 - Arquitetura do servidor: banco de dados (tabelas de escola, usuário e função) e autenticação.</a:t>
+            </a:r>
+          </a:p>
+        </p:txBody>
+      </p:sp>
+      <p:sp>
+        <p:nvSpPr>
+          <p:cNvPr id="9" name="Rectangle 9"/>
+          <p:cNvSpPr>
+            <a:spLocks noChangeArrowheads="1"/>
+          </p:cNvSpPr>
+          <p:nvPr/>
+        </p:nvSpPr>
+        <p:spPr bwMode="auto">
+          <a:xfrm>
+            <a:off x="14783471" y="16332442"/>
             <a:ext cx="17460263" cy="523220"/>
           </a:xfrm>
           <a:prstGeom prst="rect">
@@ -7982,7 +8037,7 @@
                 <a:ea typeface="Times New Roman" panose="02020603050405020304" pitchFamily="18" charset="0"/>
                 <a:cs typeface="Arial" panose="020B0604020202020204" pitchFamily="34" charset="0"/>
               </a:rPr>
-              <a:t>Fonte: Próprios autores, 2025.</a:t>
+              <a:t>Fonte: Autores (2026).</a:t>
             </a:r>
             <a:endParaRPr kumimoji="0" lang="pt-BR" altLang="pt-BR" sz="2800" b="0" i="0" u="none" strike="noStrike" cap="none" normalizeH="0" baseline="0" dirty="0">
               <a:ln>
@@ -7997,296 +8052,78 @@
           </a:p>
         </p:txBody>
       </p:sp>
-      <p:sp>
-        <p:nvSpPr>
-          <p:cNvPr id="16" name="CaixaDeTexto 15"/>
-          <p:cNvSpPr txBox="1"/>
+      <p:pic>
+        <p:nvPicPr>
+          <p:cNvPr id="2188" name="Picture 2187" descr="banner_fig_arquitetura.png"/>
+          <p:cNvPicPr>
+            <a:picLocks noChangeAspect="1"/>
+          </p:cNvPicPr>
           <p:nvPr/>
-        </p:nvSpPr>
+        </p:nvPicPr>
+        <p:blipFill>
+          <a:blip r:embed="rId10"/>
+          <a:stretch>
+            <a:fillRect/>
+          </a:stretch>
+        </p:blipFill>
         <p:spPr>
           <a:xfrm>
-            <a:off x="4469232" y="35636802"/>
-            <a:ext cx="6880323" cy="923330"/>
-          </a:xfrm>
-          <a:prstGeom prst="rect">
-            <a:avLst/>
-          </a:prstGeom>
-          <a:noFill/>
-        </p:spPr>
-        <p:txBody>
-          <a:bodyPr wrap="square" rtlCol="0">
-            <a:spAutoFit/>
-          </a:bodyPr>
-          <a:lstStyle/>
-          <a:p>
-            <a:pPr algn="ctr"/>
-            <a:r>
-              <a:rPr lang="pt-BR" sz="2700" dirty="0"/>
-              <a:t>Figura 1- Acredita que a </a:t>
-            </a:r>
-            <a:r>
-              <a:rPr lang="pt-BR" sz="2700" dirty="0" err="1"/>
-              <a:t>Collab</a:t>
-            </a:r>
-            <a:r>
-              <a:rPr lang="pt-BR" sz="2700" dirty="0"/>
-              <a:t> traz oportunidade de conhecimento da marca</a:t>
-            </a:r>
-          </a:p>
-        </p:txBody>
-      </p:sp>
-      <p:graphicFrame>
-        <p:nvGraphicFramePr>
-          <p:cNvPr id="37" name="Gráfico 36"/>
-          <p:cNvGraphicFramePr/>
-          <p:nvPr>
-            <p:extLst>
-              <p:ext uri="{D42A27DB-BD31-4B8C-83A1-F6EECF244321}">
-                <p14:modId xmlns:p14="http://schemas.microsoft.com/office/powerpoint/2010/main" val="2189308302"/>
-              </p:ext>
-            </p:extLst>
-          </p:nvPr>
-        </p:nvGraphicFramePr>
-        <p:xfrm>
-          <a:off x="5008652" y="36763942"/>
-          <a:ext cx="6696588" cy="5877378"/>
-        </p:xfrm>
-        <a:graphic>
-          <a:graphicData uri="http://schemas.openxmlformats.org/drawingml/2006/chart">
-            <c:chart xmlns:c="http://schemas.openxmlformats.org/drawingml/2006/chart" xmlns:r="http://schemas.openxmlformats.org/officeDocument/2006/relationships" r:id="rId6"/>
-          </a:graphicData>
-        </a:graphic>
-      </p:graphicFrame>
-      <p:graphicFrame>
-        <p:nvGraphicFramePr>
-          <p:cNvPr id="45" name="Gráfico 44"/>
-          <p:cNvGraphicFramePr/>
-          <p:nvPr>
-            <p:extLst>
-              <p:ext uri="{D42A27DB-BD31-4B8C-83A1-F6EECF244321}">
-                <p14:modId xmlns:p14="http://schemas.microsoft.com/office/powerpoint/2010/main" val="2836610857"/>
-              </p:ext>
-            </p:extLst>
-          </p:nvPr>
-        </p:nvGraphicFramePr>
-        <p:xfrm>
-          <a:off x="18578289" y="8124744"/>
-          <a:ext cx="11037700" cy="7929092"/>
-        </p:xfrm>
-        <a:graphic>
-          <a:graphicData uri="http://schemas.openxmlformats.org/drawingml/2006/chart">
-            <c:chart xmlns:c="http://schemas.openxmlformats.org/drawingml/2006/chart" xmlns:r="http://schemas.openxmlformats.org/officeDocument/2006/relationships" r:id="rId7"/>
-          </a:graphicData>
-        </a:graphic>
-      </p:graphicFrame>
-      <p:sp>
-        <p:nvSpPr>
-          <p:cNvPr id="8" name="Caixa de Texto 7"/>
-          <p:cNvSpPr txBox="1"/>
-          <p:nvPr/>
-        </p:nvSpPr>
-        <p:spPr>
-          <a:xfrm>
-            <a:off x="18578289" y="7343328"/>
-            <a:ext cx="10657184" cy="507831"/>
+            <a:off x="17064163" y="8050000"/>
+            <a:ext cx="14900000" cy="8132442"/>
           </a:xfrm>
           <a:prstGeom prst="rect">
             <a:avLst/>
           </a:prstGeom>
         </p:spPr>
-        <p:txBody>
-          <a:bodyPr wrap="square">
-            <a:spAutoFit/>
-          </a:bodyPr>
-          <a:lstStyle/>
-          <a:p>
-            <a:pPr marL="0" indent="0" algn="ctr" defTabSz="266700">
-              <a:spcBef>
-                <a:spcPct val="0"/>
-              </a:spcBef>
-              <a:spcAft>
-                <a:spcPct val="0"/>
-              </a:spcAft>
-            </a:pPr>
-            <a:r>
-              <a:rPr sz="2700" dirty="0" err="1">
-                <a:latin typeface="Arial" panose="020B0604020202020204"/>
-                <a:ea typeface="Times New Roman" panose="02020603050405020304"/>
-              </a:rPr>
-              <a:t>Figura</a:t>
-            </a:r>
-            <a:r>
-              <a:rPr sz="2700" dirty="0">
-                <a:latin typeface="Arial" panose="020B0604020202020204"/>
-                <a:ea typeface="Times New Roman" panose="02020603050405020304"/>
-              </a:rPr>
-              <a:t> 2: </a:t>
-            </a:r>
-            <a:r>
-              <a:rPr sz="2700" dirty="0" err="1">
-                <a:latin typeface="Arial" panose="020B0604020202020204"/>
-                <a:ea typeface="Times New Roman" panose="02020603050405020304"/>
-              </a:rPr>
-              <a:t>Motivo</a:t>
-            </a:r>
-            <a:r>
-              <a:rPr sz="2700" dirty="0">
-                <a:latin typeface="Arial" panose="020B0604020202020204"/>
-                <a:ea typeface="Times New Roman" panose="02020603050405020304"/>
-              </a:rPr>
-              <a:t> </a:t>
-            </a:r>
-            <a:r>
-              <a:rPr sz="2700" dirty="0" err="1">
-                <a:latin typeface="Arial" panose="020B0604020202020204"/>
-                <a:ea typeface="Times New Roman" panose="02020603050405020304"/>
-              </a:rPr>
-              <a:t>pelo</a:t>
-            </a:r>
-            <a:r>
-              <a:rPr sz="2700" dirty="0">
-                <a:latin typeface="Arial" panose="020B0604020202020204"/>
-                <a:ea typeface="Times New Roman" panose="02020603050405020304"/>
-              </a:rPr>
-              <a:t> qual </a:t>
-            </a:r>
-            <a:r>
-              <a:rPr sz="2700" dirty="0" err="1">
-                <a:latin typeface="Arial" panose="020B0604020202020204"/>
-                <a:ea typeface="Times New Roman" panose="02020603050405020304"/>
-              </a:rPr>
-              <a:t>consomem</a:t>
-            </a:r>
-            <a:r>
-              <a:rPr sz="2700" dirty="0">
-                <a:latin typeface="Arial" panose="020B0604020202020204"/>
-                <a:ea typeface="Times New Roman" panose="02020603050405020304"/>
-              </a:rPr>
-              <a:t> </a:t>
-            </a:r>
-            <a:r>
-              <a:rPr sz="2700" dirty="0" err="1">
-                <a:latin typeface="Arial" panose="020B0604020202020204"/>
-                <a:ea typeface="Times New Roman" panose="02020603050405020304"/>
-              </a:rPr>
-              <a:t>produtos</a:t>
-            </a:r>
-            <a:r>
-              <a:rPr sz="2700" dirty="0">
-                <a:latin typeface="Arial" panose="020B0604020202020204"/>
-                <a:ea typeface="Times New Roman" panose="02020603050405020304"/>
-              </a:rPr>
-              <a:t> de </a:t>
-            </a:r>
-            <a:r>
-              <a:rPr sz="2700" i="1" dirty="0">
-                <a:latin typeface="Arial" panose="020B0604020202020204"/>
-                <a:ea typeface="Times New Roman" panose="02020603050405020304"/>
-              </a:rPr>
-              <a:t>Collab</a:t>
-            </a:r>
-          </a:p>
-        </p:txBody>
-      </p:sp>
-      <p:sp>
-        <p:nvSpPr>
-          <p:cNvPr id="9" name="Rectangle 9"/>
-          <p:cNvSpPr>
-            <a:spLocks noChangeArrowheads="1"/>
-          </p:cNvSpPr>
+      </p:pic>
+      <p:pic>
+        <p:nvPicPr>
+          <p:cNvPr id="2189" name="Picture 2188" descr="image.png"/>
+          <p:cNvPicPr>
+            <a:picLocks noChangeAspect="1"/>
+          </p:cNvPicPr>
           <p:nvPr/>
-        </p:nvSpPr>
-        <p:spPr bwMode="auto">
+        </p:nvPicPr>
+        <p:blipFill>
+          <a:blip r:embed="rId8"/>
+          <a:stretch>
+            <a:fillRect/>
+          </a:stretch>
+        </p:blipFill>
+        <p:spPr>
           <a:xfrm>
-            <a:off x="14783471" y="15975005"/>
-            <a:ext cx="17460263" cy="523220"/>
+            <a:off x="860741" y="35033330"/>
+            <a:ext cx="5326504" cy="5200000"/>
           </a:xfrm>
           <a:prstGeom prst="rect">
             <a:avLst/>
           </a:prstGeom>
-          <a:noFill/>
-          <a:ln>
-            <a:noFill/>
-          </a:ln>
-          <a:effectLst/>
-          <a:extLst>
-            <a:ext uri="{909E8E84-426E-40DD-AFC4-6F175D3DCCD1}">
-              <a14:hiddenFill xmlns:a14="http://schemas.microsoft.com/office/drawing/2010/main">
-                <a:solidFill>
-                  <a:schemeClr val="accent1"/>
-                </a:solidFill>
-              </a14:hiddenFill>
-            </a:ext>
-            <a:ext uri="{91240B29-F687-4F45-9708-019B960494DF}">
-              <a14:hiddenLine xmlns:a14="http://schemas.microsoft.com/office/drawing/2010/main" w="9525">
-                <a:solidFill>
-                  <a:schemeClr val="tx1"/>
-                </a:solidFill>
-                <a:miter lim="800000"/>
-                <a:headEnd/>
-                <a:tailEnd/>
-              </a14:hiddenLine>
-            </a:ext>
-            <a:ext uri="{AF507438-7753-43E0-B8FC-AC1667EBCBE1}">
-              <a14:hiddenEffects xmlns:a14="http://schemas.microsoft.com/office/drawing/2010/main">
-                <a:effectLst>
-                  <a:outerShdw dist="35921" dir="2700000" algn="ctr" rotWithShape="0">
-                    <a:schemeClr val="bg2"/>
-                  </a:outerShdw>
-                </a:effectLst>
-              </a14:hiddenEffects>
-            </a:ext>
-          </a:extLst>
         </p:spPr>
-        <p:txBody>
-          <a:bodyPr vert="horz" wrap="square" lIns="91440" tIns="45720" rIns="91440" bIns="45720" numCol="1" anchor="ctr" anchorCtr="0" compatLnSpc="1">
-            <a:spAutoFit/>
-          </a:bodyPr>
-          <a:lstStyle/>
-          <a:p>
-            <a:pPr marL="0" marR="0" lvl="0" indent="180975" algn="ctr" defTabSz="914400" rtl="0" eaLnBrk="0" fontAlgn="base" latinLnBrk="0" hangingPunct="0">
-              <a:lnSpc>
-                <a:spcPct val="100000"/>
-              </a:lnSpc>
-              <a:spcBef>
-                <a:spcPct val="0"/>
-              </a:spcBef>
-              <a:spcAft>
-                <a:spcPct val="0"/>
-              </a:spcAft>
-              <a:buClrTx/>
-              <a:buSzTx/>
-              <a:buFontTx/>
-              <a:buNone/>
-            </a:pPr>
-            <a:r>
-              <a:rPr kumimoji="0" lang="pt-BR" altLang="pt-BR" sz="2800" b="0" i="0" u="none" strike="noStrike" cap="none" normalizeH="0" baseline="0" dirty="0">
-                <a:ln>
-                  <a:noFill/>
-                </a:ln>
-                <a:solidFill>
-                  <a:schemeClr val="tx1"/>
-                </a:solidFill>
-                <a:effectLst/>
-                <a:latin typeface="Arial" panose="020B0604020202020204" pitchFamily="34" charset="0"/>
-                <a:ea typeface="Times New Roman" panose="02020603050405020304" pitchFamily="18" charset="0"/>
-                <a:cs typeface="Arial" panose="020B0604020202020204" pitchFamily="34" charset="0"/>
-              </a:rPr>
-              <a:t>Fonte: Próprios autores, 2025.</a:t>
-            </a:r>
-            <a:endParaRPr kumimoji="0" lang="pt-BR" altLang="pt-BR" sz="2800" b="0" i="0" u="none" strike="noStrike" cap="none" normalizeH="0" baseline="0" dirty="0">
-              <a:ln>
-                <a:noFill/>
-              </a:ln>
-              <a:solidFill>
-                <a:schemeClr val="tx1"/>
-              </a:solidFill>
-              <a:effectLst/>
-              <a:latin typeface="Arial" panose="020B0604020202020204" pitchFamily="34" charset="0"/>
-            </a:endParaRPr>
-          </a:p>
-        </p:txBody>
-      </p:sp>
+      </p:pic>
+      <p:pic>
+        <p:nvPicPr>
+          <p:cNvPr id="2190" name="Picture 2189" descr="banner_fig_agentesIA.png"/>
+          <p:cNvPicPr>
+            <a:picLocks noChangeAspect="1"/>
+          </p:cNvPicPr>
+          <p:nvPr/>
+        </p:nvPicPr>
+        <p:blipFill>
+          <a:blip r:embed="rId11"/>
+          <a:stretch>
+            <a:fillRect/>
+          </a:stretch>
+        </p:blipFill>
+        <p:spPr>
+          <a:xfrm>
+            <a:off x="6437245" y="35033330"/>
+            <a:ext cx="9316909" cy="5200000"/>
+          </a:xfrm>
+          <a:prstGeom prst="rect">
+            <a:avLst/>
+          </a:prstGeom>
+        </p:spPr>
+      </p:pic>
     </p:spTree>
   </p:cSld>
   <p:clrMapOvr>

--- a/docs/monografia/BANNER - ÚLTIMA VERSÃO.pptx
+++ b/docs/monografia/BANNER - ÚLTIMA VERSÃO.pptx
@@ -271,2486 +271,6 @@
 </c:chartSpace>
 </file>
 
-<file path=ppt/charts/chart2.xml><?xml version="1.0" encoding="utf-8"?>
-<c:chartSpace xmlns:c="http://schemas.openxmlformats.org/drawingml/2006/chart" xmlns:a="http://schemas.openxmlformats.org/drawingml/2006/main" xmlns:r="http://schemas.openxmlformats.org/officeDocument/2006/relationships" xmlns:c16r2="http://schemas.microsoft.com/office/drawing/2015/06/chart">
-  <c:date1904 val="0"/>
-  <c:lang val="pt-BR"/>
-  <c:roundedCorners val="0"/>
-  <mc:AlternateContent xmlns:mc="http://schemas.openxmlformats.org/markup-compatibility/2006">
-    <mc:Choice xmlns:c14="http://schemas.microsoft.com/office/drawing/2007/8/2/chart" Requires="c14">
-      <c14:style val="102"/>
-    </mc:Choice>
-    <mc:Fallback>
-      <c:style val="2"/>
-    </mc:Fallback>
-  </mc:AlternateContent>
-  <c:chart>
-    <c:autoTitleDeleted val="1"/>
-    <c:plotArea>
-      <c:layout>
-        <c:manualLayout>
-          <c:layoutTarget val="inner"/>
-          <c:xMode val="edge"/>
-          <c:yMode val="edge"/>
-          <c:x val="1.3275417272198917E-2"/>
-          <c:y val="2.540469576739832E-2"/>
-          <c:w val="0.75911075909104742"/>
-          <c:h val="0.86491833603351687"/>
-        </c:manualLayout>
-      </c:layout>
-      <c:pieChart>
-        <c:varyColors val="1"/>
-        <c:ser>
-          <c:idx val="0"/>
-          <c:order val="0"/>
-          <c:tx>
-            <c:strRef>
-              <c:f>Planilha1!$B$1</c:f>
-              <c:strCache>
-                <c:ptCount val="1"/>
-                <c:pt idx="0">
-                  <c:v>Vendas</c:v>
-                </c:pt>
-              </c:strCache>
-            </c:strRef>
-          </c:tx>
-          <c:dPt>
-            <c:idx val="0"/>
-            <c:bubble3D val="0"/>
-            <c:spPr>
-              <a:solidFill>
-                <a:schemeClr val="accent2"/>
-              </a:solidFill>
-              <a:ln w="19050">
-                <a:solidFill>
-                  <a:schemeClr val="lt1"/>
-                </a:solidFill>
-              </a:ln>
-              <a:effectLst/>
-            </c:spPr>
-            <c:extLst>
-              <c:ext xmlns:c16="http://schemas.microsoft.com/office/drawing/2014/chart" uri="{C3380CC4-5D6E-409C-BE32-E72D297353CC}">
-                <c16:uniqueId val="{00000001-9216-442E-BA8C-EE064978627B}"/>
-              </c:ext>
-            </c:extLst>
-          </c:dPt>
-          <c:dPt>
-            <c:idx val="1"/>
-            <c:bubble3D val="0"/>
-            <c:spPr>
-              <a:solidFill>
-                <a:schemeClr val="accent4"/>
-              </a:solidFill>
-              <a:ln w="19050">
-                <a:solidFill>
-                  <a:schemeClr val="lt1"/>
-                </a:solidFill>
-              </a:ln>
-              <a:effectLst/>
-            </c:spPr>
-            <c:extLst>
-              <c:ext xmlns:c16="http://schemas.microsoft.com/office/drawing/2014/chart" uri="{C3380CC4-5D6E-409C-BE32-E72D297353CC}">
-                <c16:uniqueId val="{00000003-9216-442E-BA8C-EE064978627B}"/>
-              </c:ext>
-            </c:extLst>
-          </c:dPt>
-          <c:dPt>
-            <c:idx val="2"/>
-            <c:bubble3D val="0"/>
-            <c:spPr>
-              <a:solidFill>
-                <a:schemeClr val="accent6"/>
-              </a:solidFill>
-              <a:ln w="19050">
-                <a:solidFill>
-                  <a:schemeClr val="lt1"/>
-                </a:solidFill>
-              </a:ln>
-              <a:effectLst/>
-            </c:spPr>
-            <c:extLst>
-              <c:ext xmlns:c16="http://schemas.microsoft.com/office/drawing/2014/chart" uri="{C3380CC4-5D6E-409C-BE32-E72D297353CC}">
-                <c16:uniqueId val="{00000005-9216-442E-BA8C-EE064978627B}"/>
-              </c:ext>
-            </c:extLst>
-          </c:dPt>
-          <c:dPt>
-            <c:idx val="3"/>
-            <c:bubble3D val="0"/>
-            <c:spPr>
-              <a:solidFill>
-                <a:schemeClr val="accent2">
-                  <a:lumMod val="60000"/>
-                </a:schemeClr>
-              </a:solidFill>
-              <a:ln w="19050">
-                <a:solidFill>
-                  <a:schemeClr val="lt1"/>
-                </a:solidFill>
-              </a:ln>
-              <a:effectLst/>
-            </c:spPr>
-            <c:extLst>
-              <c:ext xmlns:c16="http://schemas.microsoft.com/office/drawing/2014/chart" uri="{C3380CC4-5D6E-409C-BE32-E72D297353CC}">
-                <c16:uniqueId val="{00000007-9216-442E-BA8C-EE064978627B}"/>
-              </c:ext>
-            </c:extLst>
-          </c:dPt>
-          <c:dLbls>
-            <c:dLbl>
-              <c:idx val="0"/>
-              <c:tx>
-                <c:rich>
-                  <a:bodyPr/>
-                  <a:lstStyle/>
-                  <a:p>
-                    <a:r>
-                      <a:rPr lang="en-US" sz="3200" dirty="0"/>
-                      <a:t>97%</a:t>
-                    </a:r>
-                  </a:p>
-                </c:rich>
-              </c:tx>
-              <c:dLblPos val="inEnd"/>
-              <c:showLegendKey val="0"/>
-              <c:showVal val="0"/>
-              <c:showCatName val="0"/>
-              <c:showSerName val="0"/>
-              <c:showPercent val="1"/>
-              <c:showBubbleSize val="0"/>
-              <c:extLst>
-                <c:ext xmlns:c15="http://schemas.microsoft.com/office/drawing/2012/chart" uri="{CE6537A1-D6FC-4f65-9D91-7224C49458BB}">
-                  <c15:showDataLabelsRange val="0"/>
-                </c:ext>
-                <c:ext xmlns:c16="http://schemas.microsoft.com/office/drawing/2014/chart" uri="{C3380CC4-5D6E-409C-BE32-E72D297353CC}">
-                  <c16:uniqueId val="{00000001-9216-442E-BA8C-EE064978627B}"/>
-                </c:ext>
-              </c:extLst>
-            </c:dLbl>
-            <c:dLbl>
-              <c:idx val="3"/>
-              <c:tx>
-                <c:rich>
-                  <a:bodyPr/>
-                  <a:lstStyle/>
-                  <a:p>
-                    <a:r>
-                      <a:rPr lang="en-US" sz="3200" dirty="0"/>
-                      <a:t>3%</a:t>
-                    </a:r>
-                  </a:p>
-                </c:rich>
-              </c:tx>
-              <c:dLblPos val="inEnd"/>
-              <c:showLegendKey val="0"/>
-              <c:showVal val="0"/>
-              <c:showCatName val="0"/>
-              <c:showSerName val="0"/>
-              <c:showPercent val="1"/>
-              <c:showBubbleSize val="0"/>
-              <c:extLst>
-                <c:ext xmlns:c15="http://schemas.microsoft.com/office/drawing/2012/chart" uri="{CE6537A1-D6FC-4f65-9D91-7224C49458BB}">
-                  <c15:showDataLabelsRange val="0"/>
-                </c:ext>
-                <c:ext xmlns:c16="http://schemas.microsoft.com/office/drawing/2014/chart" uri="{C3380CC4-5D6E-409C-BE32-E72D297353CC}">
-                  <c16:uniqueId val="{00000007-9216-442E-BA8C-EE064978627B}"/>
-                </c:ext>
-              </c:extLst>
-            </c:dLbl>
-            <c:spPr>
-              <a:noFill/>
-              <a:ln>
-                <a:noFill/>
-              </a:ln>
-              <a:effectLst/>
-            </c:spPr>
-            <c:txPr>
-              <a:bodyPr rot="0" spcFirstLastPara="1" vertOverflow="ellipsis" vert="horz" wrap="square" anchor="ctr" anchorCtr="1"/>
-              <a:lstStyle/>
-              <a:p>
-                <a:pPr>
-                  <a:defRPr lang="pt-BR" sz="1195" b="0" i="0" u="none" strike="noStrike" kern="1200" baseline="0">
-                    <a:solidFill>
-                      <a:schemeClr val="bg1"/>
-                    </a:solidFill>
-                    <a:latin typeface="+mn-lt"/>
-                    <a:ea typeface="+mn-ea"/>
-                    <a:cs typeface="+mn-cs"/>
-                  </a:defRPr>
-                </a:pPr>
-                <a:endParaRPr lang="pt-BR"/>
-              </a:p>
-            </c:txPr>
-            <c:dLblPos val="inEnd"/>
-            <c:showLegendKey val="0"/>
-            <c:showVal val="0"/>
-            <c:showCatName val="0"/>
-            <c:showSerName val="0"/>
-            <c:showPercent val="1"/>
-            <c:showBubbleSize val="0"/>
-            <c:showLeaderLines val="1"/>
-            <c:leaderLines>
-              <c:spPr>
-                <a:ln w="9525" cap="flat" cmpd="sng" algn="ctr">
-                  <a:solidFill>
-                    <a:schemeClr val="tx1">
-                      <a:lumMod val="35000"/>
-                      <a:lumOff val="65000"/>
-                    </a:schemeClr>
-                  </a:solidFill>
-                  <a:round/>
-                </a:ln>
-                <a:effectLst/>
-              </c:spPr>
-            </c:leaderLines>
-            <c:extLst>
-              <c:ext xmlns:c15="http://schemas.microsoft.com/office/drawing/2012/chart" uri="{CE6537A1-D6FC-4f65-9D91-7224C49458BB}"/>
-            </c:extLst>
-          </c:dLbls>
-          <c:cat>
-            <c:strRef>
-              <c:f>Planilha1!$A$2:$A$5</c:f>
-              <c:strCache>
-                <c:ptCount val="4"/>
-                <c:pt idx="0">
-                  <c:v>Sim</c:v>
-                </c:pt>
-                <c:pt idx="3">
-                  <c:v>Não</c:v>
-                </c:pt>
-              </c:strCache>
-            </c:strRef>
-          </c:cat>
-          <c:val>
-            <c:numRef>
-              <c:f>Planilha1!$B$2:$B$5</c:f>
-              <c:numCache>
-                <c:formatCode>General</c:formatCode>
-                <c:ptCount val="4"/>
-                <c:pt idx="0">
-                  <c:v>8.1999999999999993</c:v>
-                </c:pt>
-                <c:pt idx="3">
-                  <c:v>1.2</c:v>
-                </c:pt>
-              </c:numCache>
-            </c:numRef>
-          </c:val>
-          <c:extLst>
-            <c:ext xmlns:c16="http://schemas.microsoft.com/office/drawing/2014/chart" uri="{C3380CC4-5D6E-409C-BE32-E72D297353CC}">
-              <c16:uniqueId val="{00000008-9216-442E-BA8C-EE064978627B}"/>
-            </c:ext>
-          </c:extLst>
-        </c:ser>
-        <c:dLbls>
-          <c:showLegendKey val="0"/>
-          <c:showVal val="0"/>
-          <c:showCatName val="0"/>
-          <c:showSerName val="0"/>
-          <c:showPercent val="1"/>
-          <c:showBubbleSize val="0"/>
-          <c:showLeaderLines val="1"/>
-        </c:dLbls>
-        <c:firstSliceAng val="0"/>
-      </c:pieChart>
-      <c:spPr>
-        <a:noFill/>
-        <a:ln>
-          <a:noFill/>
-        </a:ln>
-        <a:effectLst/>
-      </c:spPr>
-    </c:plotArea>
-    <c:legend>
-      <c:legendPos val="r"/>
-      <c:legendEntry>
-        <c:idx val="0"/>
-        <c:txPr>
-          <a:bodyPr rot="0" spcFirstLastPara="1" vertOverflow="ellipsis" vert="horz" wrap="square" anchor="ctr" anchorCtr="1"/>
-          <a:lstStyle/>
-          <a:p>
-            <a:pPr>
-              <a:defRPr lang="pt-BR" sz="3200" b="0" i="0" u="none" strike="noStrike" kern="1200" baseline="0">
-                <a:solidFill>
-                  <a:schemeClr val="tx1"/>
-                </a:solidFill>
-                <a:latin typeface="+mn-lt"/>
-                <a:ea typeface="+mn-ea"/>
-                <a:cs typeface="+mn-cs"/>
-              </a:defRPr>
-            </a:pPr>
-            <a:endParaRPr lang="pt-BR"/>
-          </a:p>
-        </c:txPr>
-      </c:legendEntry>
-      <c:legendEntry>
-        <c:idx val="1"/>
-        <c:delete val="1"/>
-      </c:legendEntry>
-      <c:legendEntry>
-        <c:idx val="2"/>
-        <c:delete val="1"/>
-      </c:legendEntry>
-      <c:legendEntry>
-        <c:idx val="3"/>
-        <c:txPr>
-          <a:bodyPr rot="0" spcFirstLastPara="1" vertOverflow="ellipsis" vert="horz" wrap="square" anchor="ctr" anchorCtr="1"/>
-          <a:lstStyle/>
-          <a:p>
-            <a:pPr>
-              <a:defRPr lang="pt-BR" sz="3200" b="0" i="0" u="none" strike="noStrike" kern="1200" baseline="0">
-                <a:solidFill>
-                  <a:schemeClr val="tx1"/>
-                </a:solidFill>
-                <a:latin typeface="+mn-lt"/>
-                <a:ea typeface="+mn-ea"/>
-                <a:cs typeface="+mn-cs"/>
-              </a:defRPr>
-            </a:pPr>
-            <a:endParaRPr lang="pt-BR"/>
-          </a:p>
-        </c:txPr>
-      </c:legendEntry>
-      <c:overlay val="0"/>
-      <c:spPr>
-        <a:noFill/>
-        <a:ln>
-          <a:noFill/>
-        </a:ln>
-        <a:effectLst/>
-      </c:spPr>
-      <c:txPr>
-        <a:bodyPr rot="0" spcFirstLastPara="1" vertOverflow="ellipsis" vert="horz" wrap="square" anchor="ctr" anchorCtr="1"/>
-        <a:lstStyle/>
-        <a:p>
-          <a:pPr>
-            <a:defRPr lang="pt-BR" sz="3200" b="0" i="0" u="none" strike="noStrike" kern="1200" baseline="0">
-              <a:solidFill>
-                <a:schemeClr val="tx1"/>
-              </a:solidFill>
-              <a:latin typeface="+mn-lt"/>
-              <a:ea typeface="+mn-ea"/>
-              <a:cs typeface="+mn-cs"/>
-            </a:defRPr>
-          </a:pPr>
-          <a:endParaRPr lang="pt-BR"/>
-        </a:p>
-      </c:txPr>
-    </c:legend>
-    <c:plotVisOnly val="1"/>
-    <c:dispBlanksAs val="gap"/>
-    <c:showDLblsOverMax val="0"/>
-    <c:extLst>
-      <c:ext uri="{0b15fc19-7d7d-44ad-8c2d-2c3a37ce22c3}">
-        <chartProps xmlns="https://web.wps.cn/et/2018/main" chartId="{19a84880-2371-495d-997a-f6ee6fbee204}"/>
-      </c:ext>
-    </c:extLst>
-  </c:chart>
-  <c:spPr>
-    <a:noFill/>
-    <a:ln>
-      <a:noFill/>
-    </a:ln>
-    <a:effectLst/>
-  </c:spPr>
-  <c:txPr>
-    <a:bodyPr/>
-    <a:lstStyle/>
-    <a:p>
-      <a:pPr>
-        <a:defRPr lang="pt-BR">
-          <a:solidFill>
-            <a:schemeClr val="bg1"/>
-          </a:solidFill>
-        </a:defRPr>
-      </a:pPr>
-      <a:endParaRPr lang="pt-BR"/>
-    </a:p>
-  </c:txPr>
-  <c:externalData r:id="rId3">
-    <c:autoUpdate val="0"/>
-  </c:externalData>
-</c:chartSpace>
-</file>
-
-<file path=ppt/charts/chart3.xml><?xml version="1.0" encoding="utf-8"?>
-<c:chartSpace xmlns:c="http://schemas.openxmlformats.org/drawingml/2006/chart" xmlns:a="http://schemas.openxmlformats.org/drawingml/2006/main" xmlns:r="http://schemas.openxmlformats.org/officeDocument/2006/relationships" xmlns:c16r2="http://schemas.microsoft.com/office/drawing/2015/06/chart">
-  <c:date1904 val="0"/>
-  <c:lang val="pt-BR"/>
-  <c:roundedCorners val="0"/>
-  <mc:AlternateContent xmlns:mc="http://schemas.openxmlformats.org/markup-compatibility/2006">
-    <mc:Choice xmlns:c14="http://schemas.microsoft.com/office/drawing/2007/8/2/chart" Requires="c14">
-      <c14:style val="102"/>
-    </mc:Choice>
-    <mc:Fallback>
-      <c:style val="2"/>
-    </mc:Fallback>
-  </mc:AlternateContent>
-  <c:chart>
-    <c:autoTitleDeleted val="1"/>
-    <c:plotArea>
-      <c:layout>
-        <c:manualLayout>
-          <c:layoutTarget val="inner"/>
-          <c:xMode val="edge"/>
-          <c:yMode val="edge"/>
-          <c:x val="7.6136456513393918E-3"/>
-          <c:y val="0.122026281140832"/>
-          <c:w val="0.65017046772763454"/>
-          <c:h val="0.80296190357494102"/>
-        </c:manualLayout>
-      </c:layout>
-      <c:pieChart>
-        <c:varyColors val="1"/>
-        <c:ser>
-          <c:idx val="0"/>
-          <c:order val="0"/>
-          <c:tx>
-            <c:strRef>
-              <c:f>Planilha1!$B$1</c:f>
-              <c:strCache>
-                <c:ptCount val="1"/>
-                <c:pt idx="0">
-                  <c:v>Coluna1</c:v>
-                </c:pt>
-              </c:strCache>
-            </c:strRef>
-          </c:tx>
-          <c:dPt>
-            <c:idx val="0"/>
-            <c:bubble3D val="0"/>
-            <c:spPr>
-              <a:solidFill>
-                <a:schemeClr val="accent2"/>
-              </a:solidFill>
-              <a:ln>
-                <a:noFill/>
-              </a:ln>
-              <a:effectLst/>
-              <a:scene3d>
-                <a:camera prst="orthographicFront"/>
-                <a:lightRig rig="brightRoom" dir="t"/>
-              </a:scene3d>
-              <a:sp3d prstMaterial="flat">
-                <a:bevelT w="50800" h="101600" prst="angle"/>
-                <a:contourClr>
-                  <a:srgbClr val="000000"/>
-                </a:contourClr>
-              </a:sp3d>
-            </c:spPr>
-            <c:extLst>
-              <c:ext xmlns:c16="http://schemas.microsoft.com/office/drawing/2014/chart" uri="{C3380CC4-5D6E-409C-BE32-E72D297353CC}">
-                <c16:uniqueId val="{00000001-7E14-4082-A31B-05553B010D58}"/>
-              </c:ext>
-            </c:extLst>
-          </c:dPt>
-          <c:dPt>
-            <c:idx val="1"/>
-            <c:bubble3D val="0"/>
-            <c:spPr>
-              <a:solidFill>
-                <a:schemeClr val="accent4"/>
-              </a:solidFill>
-              <a:ln>
-                <a:noFill/>
-              </a:ln>
-              <a:effectLst/>
-              <a:scene3d>
-                <a:camera prst="orthographicFront"/>
-                <a:lightRig rig="brightRoom" dir="t"/>
-              </a:scene3d>
-              <a:sp3d prstMaterial="flat">
-                <a:bevelT w="50800" h="101600" prst="angle"/>
-                <a:contourClr>
-                  <a:srgbClr val="000000"/>
-                </a:contourClr>
-              </a:sp3d>
-            </c:spPr>
-            <c:extLst>
-              <c:ext xmlns:c16="http://schemas.microsoft.com/office/drawing/2014/chart" uri="{C3380CC4-5D6E-409C-BE32-E72D297353CC}">
-                <c16:uniqueId val="{00000003-7E14-4082-A31B-05553B010D58}"/>
-              </c:ext>
-            </c:extLst>
-          </c:dPt>
-          <c:dPt>
-            <c:idx val="2"/>
-            <c:bubble3D val="0"/>
-            <c:spPr>
-              <a:solidFill>
-                <a:schemeClr val="accent6"/>
-              </a:solidFill>
-              <a:ln>
-                <a:noFill/>
-              </a:ln>
-              <a:effectLst/>
-              <a:scene3d>
-                <a:camera prst="orthographicFront"/>
-                <a:lightRig rig="brightRoom" dir="t"/>
-              </a:scene3d>
-              <a:sp3d prstMaterial="flat">
-                <a:bevelT w="50800" h="101600" prst="angle"/>
-                <a:contourClr>
-                  <a:srgbClr val="000000"/>
-                </a:contourClr>
-              </a:sp3d>
-            </c:spPr>
-            <c:extLst>
-              <c:ext xmlns:c16="http://schemas.microsoft.com/office/drawing/2014/chart" uri="{C3380CC4-5D6E-409C-BE32-E72D297353CC}">
-                <c16:uniqueId val="{00000005-7E14-4082-A31B-05553B010D58}"/>
-              </c:ext>
-            </c:extLst>
-          </c:dPt>
-          <c:dPt>
-            <c:idx val="3"/>
-            <c:bubble3D val="0"/>
-            <c:spPr>
-              <a:solidFill>
-                <a:schemeClr val="accent2">
-                  <a:lumMod val="60000"/>
-                </a:schemeClr>
-              </a:solidFill>
-              <a:ln>
-                <a:noFill/>
-              </a:ln>
-              <a:effectLst/>
-              <a:scene3d>
-                <a:camera prst="orthographicFront"/>
-                <a:lightRig rig="brightRoom" dir="t"/>
-              </a:scene3d>
-              <a:sp3d prstMaterial="flat">
-                <a:bevelT w="50800" h="101600" prst="angle"/>
-                <a:contourClr>
-                  <a:srgbClr val="000000"/>
-                </a:contourClr>
-              </a:sp3d>
-            </c:spPr>
-            <c:extLst>
-              <c:ext xmlns:c16="http://schemas.microsoft.com/office/drawing/2014/chart" uri="{C3380CC4-5D6E-409C-BE32-E72D297353CC}">
-                <c16:uniqueId val="{00000007-7E14-4082-A31B-05553B010D58}"/>
-              </c:ext>
-            </c:extLst>
-          </c:dPt>
-          <c:dPt>
-            <c:idx val="4"/>
-            <c:bubble3D val="0"/>
-            <c:spPr>
-              <a:solidFill>
-                <a:schemeClr val="accent4">
-                  <a:lumMod val="60000"/>
-                </a:schemeClr>
-              </a:solidFill>
-              <a:ln>
-                <a:noFill/>
-              </a:ln>
-              <a:effectLst/>
-              <a:scene3d>
-                <a:camera prst="orthographicFront"/>
-                <a:lightRig rig="brightRoom" dir="t"/>
-              </a:scene3d>
-              <a:sp3d prstMaterial="flat">
-                <a:bevelT w="50800" h="101600" prst="angle"/>
-                <a:contourClr>
-                  <a:srgbClr val="000000"/>
-                </a:contourClr>
-              </a:sp3d>
-            </c:spPr>
-            <c:extLst>
-              <c:ext xmlns:c16="http://schemas.microsoft.com/office/drawing/2014/chart" uri="{C3380CC4-5D6E-409C-BE32-E72D297353CC}">
-                <c16:uniqueId val="{00000009-7E14-4082-A31B-05553B010D58}"/>
-              </c:ext>
-            </c:extLst>
-          </c:dPt>
-          <c:dPt>
-            <c:idx val="5"/>
-            <c:bubble3D val="0"/>
-            <c:spPr>
-              <a:solidFill>
-                <a:schemeClr val="accent6">
-                  <a:lumMod val="60000"/>
-                </a:schemeClr>
-              </a:solidFill>
-              <a:ln>
-                <a:noFill/>
-              </a:ln>
-              <a:effectLst/>
-              <a:scene3d>
-                <a:camera prst="orthographicFront"/>
-                <a:lightRig rig="brightRoom" dir="t"/>
-              </a:scene3d>
-              <a:sp3d prstMaterial="flat">
-                <a:bevelT w="50800" h="101600" prst="angle"/>
-                <a:contourClr>
-                  <a:srgbClr val="000000"/>
-                </a:contourClr>
-              </a:sp3d>
-            </c:spPr>
-            <c:extLst>
-              <c:ext xmlns:c16="http://schemas.microsoft.com/office/drawing/2014/chart" uri="{C3380CC4-5D6E-409C-BE32-E72D297353CC}">
-                <c16:uniqueId val="{0000000B-7E14-4082-A31B-05553B010D58}"/>
-              </c:ext>
-            </c:extLst>
-          </c:dPt>
-          <c:dPt>
-            <c:idx val="6"/>
-            <c:bubble3D val="0"/>
-            <c:spPr>
-              <a:solidFill>
-                <a:schemeClr val="accent2">
-                  <a:lumMod val="80000"/>
-                  <a:lumOff val="20000"/>
-                </a:schemeClr>
-              </a:solidFill>
-              <a:ln>
-                <a:noFill/>
-              </a:ln>
-              <a:effectLst/>
-              <a:scene3d>
-                <a:camera prst="orthographicFront"/>
-                <a:lightRig rig="brightRoom" dir="t"/>
-              </a:scene3d>
-              <a:sp3d prstMaterial="flat">
-                <a:bevelT w="50800" h="101600" prst="angle"/>
-                <a:contourClr>
-                  <a:srgbClr val="000000"/>
-                </a:contourClr>
-              </a:sp3d>
-            </c:spPr>
-            <c:extLst>
-              <c:ext xmlns:c16="http://schemas.microsoft.com/office/drawing/2014/chart" uri="{C3380CC4-5D6E-409C-BE32-E72D297353CC}">
-                <c16:uniqueId val="{0000000D-7E14-4082-A31B-05553B010D58}"/>
-              </c:ext>
-            </c:extLst>
-          </c:dPt>
-          <c:dPt>
-            <c:idx val="7"/>
-            <c:bubble3D val="0"/>
-            <c:spPr>
-              <a:solidFill>
-                <a:schemeClr val="accent4">
-                  <a:lumMod val="80000"/>
-                  <a:lumOff val="20000"/>
-                </a:schemeClr>
-              </a:solidFill>
-              <a:ln>
-                <a:noFill/>
-              </a:ln>
-              <a:effectLst/>
-              <a:scene3d>
-                <a:camera prst="orthographicFront"/>
-                <a:lightRig rig="brightRoom" dir="t"/>
-              </a:scene3d>
-              <a:sp3d prstMaterial="flat">
-                <a:bevelT w="50800" h="101600" prst="angle"/>
-                <a:contourClr>
-                  <a:srgbClr val="000000"/>
-                </a:contourClr>
-              </a:sp3d>
-            </c:spPr>
-            <c:extLst>
-              <c:ext xmlns:c16="http://schemas.microsoft.com/office/drawing/2014/chart" uri="{C3380CC4-5D6E-409C-BE32-E72D297353CC}">
-                <c16:uniqueId val="{0000000F-7E14-4082-A31B-05553B010D58}"/>
-              </c:ext>
-            </c:extLst>
-          </c:dPt>
-          <c:dPt>
-            <c:idx val="8"/>
-            <c:bubble3D val="0"/>
-            <c:spPr>
-              <a:solidFill>
-                <a:schemeClr val="accent6">
-                  <a:lumMod val="80000"/>
-                  <a:lumOff val="20000"/>
-                </a:schemeClr>
-              </a:solidFill>
-              <a:ln>
-                <a:noFill/>
-              </a:ln>
-              <a:effectLst/>
-              <a:scene3d>
-                <a:camera prst="orthographicFront"/>
-                <a:lightRig rig="brightRoom" dir="t"/>
-              </a:scene3d>
-              <a:sp3d prstMaterial="flat">
-                <a:bevelT w="50800" h="101600" prst="angle"/>
-                <a:contourClr>
-                  <a:srgbClr val="000000"/>
-                </a:contourClr>
-              </a:sp3d>
-            </c:spPr>
-            <c:extLst>
-              <c:ext xmlns:c16="http://schemas.microsoft.com/office/drawing/2014/chart" uri="{C3380CC4-5D6E-409C-BE32-E72D297353CC}">
-                <c16:uniqueId val="{00000011-7E14-4082-A31B-05553B010D58}"/>
-              </c:ext>
-            </c:extLst>
-          </c:dPt>
-          <c:dLbls>
-            <c:dLbl>
-              <c:idx val="2"/>
-              <c:tx>
-                <c:rich>
-                  <a:bodyPr/>
-                  <a:lstStyle/>
-                  <a:p>
-                    <a:r>
-                      <a:rPr lang="en-US"/>
-                      <a:t>3%</a:t>
-                    </a:r>
-                    <a:endParaRPr lang="en-US" sz="1260" baseline="0"/>
-                  </a:p>
-                </c:rich>
-              </c:tx>
-              <c:dLblPos val="inEnd"/>
-              <c:showLegendKey val="0"/>
-              <c:showVal val="0"/>
-              <c:showCatName val="0"/>
-              <c:showSerName val="0"/>
-              <c:showPercent val="1"/>
-              <c:showBubbleSize val="0"/>
-              <c:extLst>
-                <c:ext xmlns:c15="http://schemas.microsoft.com/office/drawing/2012/chart" uri="{CE6537A1-D6FC-4f65-9D91-7224C49458BB}">
-                  <c15:showDataLabelsRange val="0"/>
-                </c:ext>
-                <c:ext xmlns:c16="http://schemas.microsoft.com/office/drawing/2014/chart" uri="{C3380CC4-5D6E-409C-BE32-E72D297353CC}">
-                  <c16:uniqueId val="{00000005-7E14-4082-A31B-05553B010D58}"/>
-                </c:ext>
-              </c:extLst>
-            </c:dLbl>
-            <c:dLbl>
-              <c:idx val="5"/>
-              <c:layout>
-                <c:manualLayout>
-                  <c:x val="6.1451212817782278E-2"/>
-                  <c:y val="0.15817697876703959"/>
-                </c:manualLayout>
-              </c:layout>
-              <c:dLblPos val="bestFit"/>
-              <c:showLegendKey val="0"/>
-              <c:showVal val="0"/>
-              <c:showCatName val="0"/>
-              <c:showSerName val="0"/>
-              <c:showPercent val="1"/>
-              <c:showBubbleSize val="0"/>
-              <c:extLst>
-                <c:ext xmlns:c15="http://schemas.microsoft.com/office/drawing/2012/chart" uri="{CE6537A1-D6FC-4f65-9D91-7224C49458BB}"/>
-                <c:ext xmlns:c16="http://schemas.microsoft.com/office/drawing/2014/chart" uri="{C3380CC4-5D6E-409C-BE32-E72D297353CC}">
-                  <c16:uniqueId val="{0000000B-7E14-4082-A31B-05553B010D58}"/>
-                </c:ext>
-              </c:extLst>
-            </c:dLbl>
-            <c:dLbl>
-              <c:idx val="7"/>
-              <c:layout>
-                <c:manualLayout>
-                  <c:x val="6.5740133284760537E-3"/>
-                  <c:y val="2.8230446784330034E-2"/>
-                </c:manualLayout>
-              </c:layout>
-              <c:spPr>
-                <a:noFill/>
-                <a:ln>
-                  <a:noFill/>
-                </a:ln>
-                <a:effectLst/>
-              </c:spPr>
-              <c:txPr>
-                <a:bodyPr rot="0" spcFirstLastPara="1" vertOverflow="ellipsis" vert="horz" wrap="square" lIns="38100" tIns="19050" rIns="38100" bIns="19050" anchor="ctr" anchorCtr="1">
-                  <a:spAutoFit/>
-                </a:bodyPr>
-                <a:lstStyle/>
-                <a:p>
-                  <a:pPr>
-                    <a:defRPr lang="pt-BR" sz="3200" b="0" i="0" u="none" strike="noStrike" kern="1200" baseline="0">
-                      <a:solidFill>
-                        <a:schemeClr val="tx1"/>
-                      </a:solidFill>
-                      <a:latin typeface="+mn-lt"/>
-                      <a:ea typeface="+mn-ea"/>
-                      <a:cs typeface="+mn-cs"/>
-                    </a:defRPr>
-                  </a:pPr>
-                  <a:endParaRPr lang="pt-BR"/>
-                </a:p>
-              </c:txPr>
-              <c:dLblPos val="bestFit"/>
-              <c:showLegendKey val="0"/>
-              <c:showVal val="0"/>
-              <c:showCatName val="0"/>
-              <c:showSerName val="0"/>
-              <c:showPercent val="1"/>
-              <c:showBubbleSize val="0"/>
-              <c:extLst>
-                <c:ext xmlns:c15="http://schemas.microsoft.com/office/drawing/2012/chart" uri="{CE6537A1-D6FC-4f65-9D91-7224C49458BB}"/>
-                <c:ext xmlns:c16="http://schemas.microsoft.com/office/drawing/2014/chart" uri="{C3380CC4-5D6E-409C-BE32-E72D297353CC}">
-                  <c16:uniqueId val="{0000000F-7E14-4082-A31B-05553B010D58}"/>
-                </c:ext>
-              </c:extLst>
-            </c:dLbl>
-            <c:dLbl>
-              <c:idx val="8"/>
-              <c:layout>
-                <c:manualLayout>
-                  <c:x val="2.2517706721969843E-2"/>
-                  <c:y val="2.3178194229698992E-2"/>
-                </c:manualLayout>
-              </c:layout>
-              <c:spPr>
-                <a:noFill/>
-                <a:ln>
-                  <a:noFill/>
-                </a:ln>
-                <a:effectLst/>
-              </c:spPr>
-              <c:txPr>
-                <a:bodyPr rot="0" spcFirstLastPara="1" vertOverflow="ellipsis" vert="horz" wrap="square" lIns="38100" tIns="19050" rIns="38100" bIns="19050" anchor="ctr" anchorCtr="1">
-                  <a:spAutoFit/>
-                </a:bodyPr>
-                <a:lstStyle/>
-                <a:p>
-                  <a:pPr>
-                    <a:defRPr lang="pt-BR" sz="3200" b="0" i="0" u="none" strike="noStrike" kern="1200" baseline="0">
-                      <a:solidFill>
-                        <a:schemeClr val="tx1"/>
-                      </a:solidFill>
-                      <a:latin typeface="+mn-lt"/>
-                      <a:ea typeface="+mn-ea"/>
-                      <a:cs typeface="+mn-cs"/>
-                    </a:defRPr>
-                  </a:pPr>
-                  <a:endParaRPr lang="pt-BR"/>
-                </a:p>
-              </c:txPr>
-              <c:dLblPos val="bestFit"/>
-              <c:showLegendKey val="0"/>
-              <c:showVal val="0"/>
-              <c:showCatName val="0"/>
-              <c:showSerName val="0"/>
-              <c:showPercent val="1"/>
-              <c:showBubbleSize val="0"/>
-              <c:extLst>
-                <c:ext xmlns:c15="http://schemas.microsoft.com/office/drawing/2012/chart" uri="{CE6537A1-D6FC-4f65-9D91-7224C49458BB}"/>
-                <c:ext xmlns:c16="http://schemas.microsoft.com/office/drawing/2014/chart" uri="{C3380CC4-5D6E-409C-BE32-E72D297353CC}">
-                  <c16:uniqueId val="{00000011-7E14-4082-A31B-05553B010D58}"/>
-                </c:ext>
-              </c:extLst>
-            </c:dLbl>
-            <c:spPr>
-              <a:noFill/>
-              <a:ln>
-                <a:noFill/>
-              </a:ln>
-              <a:effectLst/>
-            </c:spPr>
-            <c:txPr>
-              <a:bodyPr rot="0" spcFirstLastPara="1" vertOverflow="ellipsis" vert="horz" wrap="square" lIns="38100" tIns="19050" rIns="38100" bIns="19050" anchor="ctr" anchorCtr="1">
-                <a:spAutoFit/>
-              </a:bodyPr>
-              <a:lstStyle/>
-              <a:p>
-                <a:pPr>
-                  <a:defRPr lang="pt-BR" sz="3200" b="0" i="0" u="none" strike="noStrike" kern="1200" baseline="0">
-                    <a:solidFill>
-                      <a:schemeClr val="bg1"/>
-                    </a:solidFill>
-                    <a:latin typeface="+mn-lt"/>
-                    <a:ea typeface="+mn-ea"/>
-                    <a:cs typeface="+mn-cs"/>
-                  </a:defRPr>
-                </a:pPr>
-                <a:endParaRPr lang="pt-BR"/>
-              </a:p>
-            </c:txPr>
-            <c:dLblPos val="inEnd"/>
-            <c:showLegendKey val="0"/>
-            <c:showVal val="0"/>
-            <c:showCatName val="0"/>
-            <c:showSerName val="0"/>
-            <c:showPercent val="1"/>
-            <c:showBubbleSize val="0"/>
-            <c:showLeaderLines val="1"/>
-            <c:leaderLines>
-              <c:spPr>
-                <a:ln w="9525" cap="flat" cmpd="sng" algn="ctr">
-                  <a:solidFill>
-                    <a:schemeClr val="tx1">
-                      <a:lumMod val="35000"/>
-                      <a:lumOff val="65000"/>
-                    </a:schemeClr>
-                  </a:solidFill>
-                  <a:round/>
-                </a:ln>
-                <a:effectLst/>
-              </c:spPr>
-            </c:leaderLines>
-            <c:extLst>
-              <c:ext xmlns:c15="http://schemas.microsoft.com/office/drawing/2012/chart" uri="{CE6537A1-D6FC-4f65-9D91-7224C49458BB}"/>
-            </c:extLst>
-          </c:dLbls>
-          <c:cat>
-            <c:strRef>
-              <c:f>Planilha1!$A$2:$A$10</c:f>
-              <c:strCache>
-                <c:ptCount val="9"/>
-                <c:pt idx="0">
-                  <c:v>Nostalgia </c:v>
-                </c:pt>
-                <c:pt idx="1">
-                  <c:v>Por ser consumidor da marca </c:v>
-                </c:pt>
-                <c:pt idx="2">
-                  <c:v>Ainda não consumi</c:v>
-                </c:pt>
-                <c:pt idx="3">
-                  <c:v>Apenas por curiosidade </c:v>
-                </c:pt>
-                <c:pt idx="4">
-                  <c:v>Para conhecer as marcas </c:v>
-                </c:pt>
-                <c:pt idx="5">
-                  <c:v>Não consome</c:v>
-                </c:pt>
-                <c:pt idx="6">
-                  <c:v>Pela experiência </c:v>
-                </c:pt>
-                <c:pt idx="7">
-                  <c:v>Vendas</c:v>
-                </c:pt>
-                <c:pt idx="8">
-                  <c:v>Exclusividade </c:v>
-                </c:pt>
-              </c:strCache>
-            </c:strRef>
-          </c:cat>
-          <c:val>
-            <c:numRef>
-              <c:f>Planilha1!$B$2:$B$10</c:f>
-              <c:numCache>
-                <c:formatCode>0%</c:formatCode>
-                <c:ptCount val="9"/>
-                <c:pt idx="0">
-                  <c:v>0.06</c:v>
-                </c:pt>
-                <c:pt idx="1">
-                  <c:v>0.2</c:v>
-                </c:pt>
-                <c:pt idx="2">
-                  <c:v>0.03</c:v>
-                </c:pt>
-                <c:pt idx="3">
-                  <c:v>0.3</c:v>
-                </c:pt>
-                <c:pt idx="4">
-                  <c:v>0.3</c:v>
-                </c:pt>
-                <c:pt idx="5">
-                  <c:v>0.03</c:v>
-                </c:pt>
-                <c:pt idx="6">
-                  <c:v>0.01</c:v>
-                </c:pt>
-                <c:pt idx="7">
-                  <c:v>0.01</c:v>
-                </c:pt>
-                <c:pt idx="8">
-                  <c:v>0.01</c:v>
-                </c:pt>
-              </c:numCache>
-            </c:numRef>
-          </c:val>
-          <c:extLst>
-            <c:ext xmlns:c16="http://schemas.microsoft.com/office/drawing/2014/chart" uri="{C3380CC4-5D6E-409C-BE32-E72D297353CC}">
-              <c16:uniqueId val="{00000012-7E14-4082-A31B-05553B010D58}"/>
-            </c:ext>
-          </c:extLst>
-        </c:ser>
-        <c:dLbls>
-          <c:showLegendKey val="0"/>
-          <c:showVal val="0"/>
-          <c:showCatName val="0"/>
-          <c:showSerName val="0"/>
-          <c:showPercent val="1"/>
-          <c:showBubbleSize val="0"/>
-          <c:showLeaderLines val="1"/>
-        </c:dLbls>
-        <c:firstSliceAng val="0"/>
-      </c:pieChart>
-      <c:spPr>
-        <a:noFill/>
-        <a:ln>
-          <a:noFill/>
-        </a:ln>
-        <a:effectLst/>
-      </c:spPr>
-    </c:plotArea>
-    <c:legend>
-      <c:legendPos val="r"/>
-      <c:legendEntry>
-        <c:idx val="0"/>
-        <c:txPr>
-          <a:bodyPr rot="0" spcFirstLastPara="1" vertOverflow="ellipsis" vert="horz" wrap="square" anchor="ctr" anchorCtr="1"/>
-          <a:lstStyle/>
-          <a:p>
-            <a:pPr>
-              <a:defRPr lang="pt-BR" sz="2400" b="0" i="0" u="none" strike="noStrike" kern="1000" cap="none" spc="0" normalizeH="0" baseline="0">
-                <a:solidFill>
-                  <a:schemeClr val="tx1">
-                    <a:lumMod val="65000"/>
-                    <a:lumOff val="35000"/>
-                  </a:schemeClr>
-                </a:solidFill>
-                <a:uFill>
-                  <a:solidFill>
-                    <a:schemeClr val="tx1">
-                      <a:lumMod val="65000"/>
-                      <a:lumOff val="35000"/>
-                    </a:schemeClr>
-                  </a:solidFill>
-                </a:uFill>
-                <a:latin typeface="+mn-lt"/>
-                <a:ea typeface="+mn-ea"/>
-                <a:cs typeface="+mn-cs"/>
-              </a:defRPr>
-            </a:pPr>
-            <a:endParaRPr lang="pt-BR"/>
-          </a:p>
-        </c:txPr>
-      </c:legendEntry>
-      <c:legendEntry>
-        <c:idx val="1"/>
-        <c:txPr>
-          <a:bodyPr rot="0" spcFirstLastPara="1" vertOverflow="ellipsis" vert="horz" wrap="square" anchor="ctr" anchorCtr="1"/>
-          <a:lstStyle/>
-          <a:p>
-            <a:pPr>
-              <a:defRPr lang="pt-BR" sz="2400" b="0" i="0" u="none" strike="noStrike" kern="1000" cap="none" spc="0" normalizeH="0" baseline="0">
-                <a:solidFill>
-                  <a:schemeClr val="tx1">
-                    <a:lumMod val="65000"/>
-                    <a:lumOff val="35000"/>
-                  </a:schemeClr>
-                </a:solidFill>
-                <a:uFill>
-                  <a:solidFill>
-                    <a:schemeClr val="tx1">
-                      <a:lumMod val="65000"/>
-                      <a:lumOff val="35000"/>
-                    </a:schemeClr>
-                  </a:solidFill>
-                </a:uFill>
-                <a:latin typeface="+mn-lt"/>
-                <a:ea typeface="+mn-ea"/>
-                <a:cs typeface="+mn-cs"/>
-              </a:defRPr>
-            </a:pPr>
-            <a:endParaRPr lang="pt-BR"/>
-          </a:p>
-        </c:txPr>
-      </c:legendEntry>
-      <c:legendEntry>
-        <c:idx val="2"/>
-        <c:txPr>
-          <a:bodyPr rot="0" spcFirstLastPara="1" vertOverflow="ellipsis" vert="horz" wrap="square" anchor="ctr" anchorCtr="1"/>
-          <a:lstStyle/>
-          <a:p>
-            <a:pPr>
-              <a:defRPr lang="pt-BR" sz="2400" b="0" i="0" u="none" strike="noStrike" kern="1000" cap="none" spc="0" normalizeH="0" baseline="0">
-                <a:solidFill>
-                  <a:schemeClr val="tx1">
-                    <a:lumMod val="65000"/>
-                    <a:lumOff val="35000"/>
-                  </a:schemeClr>
-                </a:solidFill>
-                <a:uFill>
-                  <a:solidFill>
-                    <a:schemeClr val="tx1">
-                      <a:lumMod val="65000"/>
-                      <a:lumOff val="35000"/>
-                    </a:schemeClr>
-                  </a:solidFill>
-                </a:uFill>
-                <a:latin typeface="+mn-lt"/>
-                <a:ea typeface="+mn-ea"/>
-                <a:cs typeface="+mn-cs"/>
-              </a:defRPr>
-            </a:pPr>
-            <a:endParaRPr lang="pt-BR"/>
-          </a:p>
-        </c:txPr>
-      </c:legendEntry>
-      <c:legendEntry>
-        <c:idx val="3"/>
-        <c:txPr>
-          <a:bodyPr rot="0" spcFirstLastPara="1" vertOverflow="ellipsis" vert="horz" wrap="square" anchor="ctr" anchorCtr="1"/>
-          <a:lstStyle/>
-          <a:p>
-            <a:pPr>
-              <a:defRPr lang="pt-BR" sz="2400" b="0" i="0" u="none" strike="noStrike" kern="1000" cap="none" spc="0" normalizeH="0" baseline="0">
-                <a:solidFill>
-                  <a:schemeClr val="tx1">
-                    <a:lumMod val="65000"/>
-                    <a:lumOff val="35000"/>
-                  </a:schemeClr>
-                </a:solidFill>
-                <a:uFill>
-                  <a:solidFill>
-                    <a:schemeClr val="tx1">
-                      <a:lumMod val="65000"/>
-                      <a:lumOff val="35000"/>
-                    </a:schemeClr>
-                  </a:solidFill>
-                </a:uFill>
-                <a:latin typeface="+mn-lt"/>
-                <a:ea typeface="+mn-ea"/>
-                <a:cs typeface="+mn-cs"/>
-              </a:defRPr>
-            </a:pPr>
-            <a:endParaRPr lang="pt-BR"/>
-          </a:p>
-        </c:txPr>
-      </c:legendEntry>
-      <c:legendEntry>
-        <c:idx val="4"/>
-        <c:txPr>
-          <a:bodyPr rot="0" spcFirstLastPara="1" vertOverflow="ellipsis" vert="horz" wrap="square" anchor="ctr" anchorCtr="1"/>
-          <a:lstStyle/>
-          <a:p>
-            <a:pPr>
-              <a:defRPr lang="pt-BR" sz="2400" b="0" i="0" u="none" strike="noStrike" kern="1000" cap="none" spc="0" normalizeH="0" baseline="0">
-                <a:solidFill>
-                  <a:schemeClr val="tx1">
-                    <a:lumMod val="65000"/>
-                    <a:lumOff val="35000"/>
-                  </a:schemeClr>
-                </a:solidFill>
-                <a:uFill>
-                  <a:solidFill>
-                    <a:schemeClr val="tx1">
-                      <a:lumMod val="65000"/>
-                      <a:lumOff val="35000"/>
-                    </a:schemeClr>
-                  </a:solidFill>
-                </a:uFill>
-                <a:latin typeface="+mn-lt"/>
-                <a:ea typeface="+mn-ea"/>
-                <a:cs typeface="+mn-cs"/>
-              </a:defRPr>
-            </a:pPr>
-            <a:endParaRPr lang="pt-BR"/>
-          </a:p>
-        </c:txPr>
-      </c:legendEntry>
-      <c:legendEntry>
-        <c:idx val="5"/>
-        <c:txPr>
-          <a:bodyPr rot="0" spcFirstLastPara="1" vertOverflow="ellipsis" vert="horz" wrap="square" anchor="ctr" anchorCtr="1"/>
-          <a:lstStyle/>
-          <a:p>
-            <a:pPr>
-              <a:defRPr lang="pt-BR" sz="2400" b="0" i="0" u="none" strike="noStrike" kern="1000" cap="none" spc="0" normalizeH="0" baseline="0">
-                <a:solidFill>
-                  <a:schemeClr val="tx1">
-                    <a:lumMod val="65000"/>
-                    <a:lumOff val="35000"/>
-                  </a:schemeClr>
-                </a:solidFill>
-                <a:uFill>
-                  <a:solidFill>
-                    <a:schemeClr val="tx1">
-                      <a:lumMod val="65000"/>
-                      <a:lumOff val="35000"/>
-                    </a:schemeClr>
-                  </a:solidFill>
-                </a:uFill>
-                <a:latin typeface="+mn-lt"/>
-                <a:ea typeface="+mn-ea"/>
-                <a:cs typeface="+mn-cs"/>
-              </a:defRPr>
-            </a:pPr>
-            <a:endParaRPr lang="pt-BR"/>
-          </a:p>
-        </c:txPr>
-      </c:legendEntry>
-      <c:legendEntry>
-        <c:idx val="6"/>
-        <c:txPr>
-          <a:bodyPr rot="0" spcFirstLastPara="1" vertOverflow="ellipsis" vert="horz" wrap="square" anchor="ctr" anchorCtr="1"/>
-          <a:lstStyle/>
-          <a:p>
-            <a:pPr>
-              <a:defRPr lang="pt-BR" sz="2400" b="0" i="0" u="none" strike="noStrike" kern="1000" cap="none" spc="0" normalizeH="0" baseline="0">
-                <a:solidFill>
-                  <a:schemeClr val="tx1">
-                    <a:lumMod val="65000"/>
-                    <a:lumOff val="35000"/>
-                  </a:schemeClr>
-                </a:solidFill>
-                <a:uFill>
-                  <a:solidFill>
-                    <a:schemeClr val="tx1">
-                      <a:lumMod val="65000"/>
-                      <a:lumOff val="35000"/>
-                    </a:schemeClr>
-                  </a:solidFill>
-                </a:uFill>
-                <a:latin typeface="+mn-lt"/>
-                <a:ea typeface="+mn-ea"/>
-                <a:cs typeface="+mn-cs"/>
-              </a:defRPr>
-            </a:pPr>
-            <a:endParaRPr lang="pt-BR"/>
-          </a:p>
-        </c:txPr>
-      </c:legendEntry>
-      <c:legendEntry>
-        <c:idx val="7"/>
-        <c:txPr>
-          <a:bodyPr rot="0" spcFirstLastPara="1" vertOverflow="ellipsis" vert="horz" wrap="square" anchor="ctr" anchorCtr="1"/>
-          <a:lstStyle/>
-          <a:p>
-            <a:pPr>
-              <a:defRPr lang="pt-BR" sz="2400" b="0" i="0" u="none" strike="noStrike" kern="1000" cap="none" spc="0" normalizeH="0" baseline="0">
-                <a:solidFill>
-                  <a:schemeClr val="tx1">
-                    <a:lumMod val="65000"/>
-                    <a:lumOff val="35000"/>
-                  </a:schemeClr>
-                </a:solidFill>
-                <a:uFill>
-                  <a:solidFill>
-                    <a:schemeClr val="tx1">
-                      <a:lumMod val="65000"/>
-                      <a:lumOff val="35000"/>
-                    </a:schemeClr>
-                  </a:solidFill>
-                </a:uFill>
-                <a:latin typeface="+mn-lt"/>
-                <a:ea typeface="+mn-ea"/>
-                <a:cs typeface="+mn-cs"/>
-              </a:defRPr>
-            </a:pPr>
-            <a:endParaRPr lang="pt-BR"/>
-          </a:p>
-        </c:txPr>
-      </c:legendEntry>
-      <c:legendEntry>
-        <c:idx val="8"/>
-        <c:txPr>
-          <a:bodyPr rot="0" spcFirstLastPara="1" vertOverflow="ellipsis" vert="horz" wrap="square" anchor="ctr" anchorCtr="1"/>
-          <a:lstStyle/>
-          <a:p>
-            <a:pPr>
-              <a:defRPr lang="pt-BR" sz="2400" b="0" i="0" u="none" strike="noStrike" kern="1000" cap="none" spc="0" normalizeH="0" baseline="0">
-                <a:solidFill>
-                  <a:schemeClr val="tx1">
-                    <a:lumMod val="65000"/>
-                    <a:lumOff val="35000"/>
-                  </a:schemeClr>
-                </a:solidFill>
-                <a:uFill>
-                  <a:solidFill>
-                    <a:schemeClr val="tx1">
-                      <a:lumMod val="65000"/>
-                      <a:lumOff val="35000"/>
-                    </a:schemeClr>
-                  </a:solidFill>
-                </a:uFill>
-                <a:latin typeface="+mn-lt"/>
-                <a:ea typeface="+mn-ea"/>
-                <a:cs typeface="+mn-cs"/>
-              </a:defRPr>
-            </a:pPr>
-            <a:endParaRPr lang="pt-BR"/>
-          </a:p>
-        </c:txPr>
-      </c:legendEntry>
-      <c:layout>
-        <c:manualLayout>
-          <c:xMode val="edge"/>
-          <c:yMode val="edge"/>
-          <c:x val="0.64722292774450429"/>
-          <c:y val="0.10530534026167616"/>
-          <c:w val="0.35277707225549559"/>
-          <c:h val="0.89469465973832374"/>
-        </c:manualLayout>
-      </c:layout>
-      <c:overlay val="0"/>
-      <c:spPr>
-        <a:noFill/>
-        <a:ln>
-          <a:noFill/>
-        </a:ln>
-        <a:effectLst/>
-      </c:spPr>
-      <c:txPr>
-        <a:bodyPr rot="0" spcFirstLastPara="1" vertOverflow="ellipsis" vert="horz" wrap="square" anchor="ctr" anchorCtr="1"/>
-        <a:lstStyle/>
-        <a:p>
-          <a:pPr>
-            <a:defRPr lang="pt-BR" sz="2400" b="0" i="0" u="none" strike="noStrike" kern="1000" cap="none" spc="0" normalizeH="0" baseline="0">
-              <a:solidFill>
-                <a:schemeClr val="tx1">
-                  <a:lumMod val="65000"/>
-                  <a:lumOff val="35000"/>
-                </a:schemeClr>
-              </a:solidFill>
-              <a:uFill>
-                <a:solidFill>
-                  <a:schemeClr val="tx1">
-                    <a:lumMod val="65000"/>
-                    <a:lumOff val="35000"/>
-                  </a:schemeClr>
-                </a:solidFill>
-              </a:uFill>
-              <a:latin typeface="+mn-lt"/>
-              <a:ea typeface="+mn-ea"/>
-              <a:cs typeface="+mn-cs"/>
-            </a:defRPr>
-          </a:pPr>
-          <a:endParaRPr lang="pt-BR"/>
-        </a:p>
-      </c:txPr>
-    </c:legend>
-    <c:plotVisOnly val="1"/>
-    <c:dispBlanksAs val="gap"/>
-    <c:showDLblsOverMax val="0"/>
-    <c:extLst>
-      <c:ext uri="{0b15fc19-7d7d-44ad-8c2d-2c3a37ce22c3}">
-        <chartProps xmlns="https://web.wps.cn/et/2018/main" chartId="{7dd528ba-75ec-4894-b1e5-e06c79cc722f}"/>
-      </c:ext>
-    </c:extLst>
-  </c:chart>
-  <c:spPr>
-    <a:noFill/>
-    <a:ln>
-      <a:noFill/>
-    </a:ln>
-    <a:effectLst/>
-  </c:spPr>
-  <c:txPr>
-    <a:bodyPr/>
-    <a:lstStyle/>
-    <a:p>
-      <a:pPr>
-        <a:defRPr lang="pt-BR"/>
-      </a:pPr>
-      <a:endParaRPr lang="pt-BR"/>
-    </a:p>
-  </c:txPr>
-  <c:externalData r:id="rId3">
-    <c:autoUpdate val="0"/>
-  </c:externalData>
-</c:chartSpace>
-</file>
-
-<file path=ppt/charts/colors1.xml><?xml version="1.0" encoding="utf-8"?>
-<cs:colorStyle xmlns:cs="http://schemas.microsoft.com/office/drawing/2012/chartStyle" xmlns:a="http://schemas.openxmlformats.org/drawingml/2006/main" meth="cycle" id="12">
-  <a:schemeClr val="accent2"/>
-  <a:schemeClr val="accent4"/>
-  <a:schemeClr val="accent6"/>
-  <cs:variation/>
-  <cs:variation>
-    <a:lumMod val="60000"/>
-  </cs:variation>
-  <cs:variation>
-    <a:lumMod val="80000"/>
-    <a:lumOff val="20000"/>
-  </cs:variation>
-  <cs:variation>
-    <a:lumMod val="80000"/>
-  </cs:variation>
-  <cs:variation>
-    <a:lumMod val="60000"/>
-    <a:lumOff val="40000"/>
-  </cs:variation>
-  <cs:variation>
-    <a:lumMod val="50000"/>
-  </cs:variation>
-  <cs:variation>
-    <a:lumMod val="70000"/>
-    <a:lumOff val="30000"/>
-  </cs:variation>
-  <cs:variation>
-    <a:lumMod val="70000"/>
-  </cs:variation>
-  <cs:variation>
-    <a:lumMod val="50000"/>
-    <a:lumOff val="50000"/>
-  </cs:variation>
-</cs:colorStyle>
-</file>
-
-<file path=ppt/charts/colors2.xml><?xml version="1.0" encoding="utf-8"?>
-<cs:colorStyle xmlns:cs="http://schemas.microsoft.com/office/drawing/2012/chartStyle" xmlns:a="http://schemas.openxmlformats.org/drawingml/2006/main" meth="cycle" id="12">
-  <a:schemeClr val="accent2"/>
-  <a:schemeClr val="accent4"/>
-  <a:schemeClr val="accent6"/>
-  <cs:variation/>
-  <cs:variation>
-    <a:lumMod val="60000"/>
-  </cs:variation>
-  <cs:variation>
-    <a:lumMod val="80000"/>
-    <a:lumOff val="20000"/>
-  </cs:variation>
-  <cs:variation>
-    <a:lumMod val="80000"/>
-  </cs:variation>
-  <cs:variation>
-    <a:lumMod val="60000"/>
-    <a:lumOff val="40000"/>
-  </cs:variation>
-  <cs:variation>
-    <a:lumMod val="50000"/>
-  </cs:variation>
-  <cs:variation>
-    <a:lumMod val="70000"/>
-    <a:lumOff val="30000"/>
-  </cs:variation>
-  <cs:variation>
-    <a:lumMod val="70000"/>
-  </cs:variation>
-  <cs:variation>
-    <a:lumMod val="50000"/>
-    <a:lumOff val="50000"/>
-  </cs:variation>
-</cs:colorStyle>
-</file>
-
-<file path=ppt/charts/style1.xml><?xml version="1.0" encoding="utf-8"?>
-<cs:chartStyle xmlns:cs="http://schemas.microsoft.com/office/drawing/2012/chartStyle" xmlns:a="http://schemas.openxmlformats.org/drawingml/2006/main" id="251">
-  <cs:axisTitle>
-    <cs:lnRef idx="0"/>
-    <cs:fillRef idx="0"/>
-    <cs:effectRef idx="0"/>
-    <cs:fontRef idx="minor">
-      <a:schemeClr val="tx1">
-        <a:lumMod val="65000"/>
-        <a:lumOff val="35000"/>
-      </a:schemeClr>
-    </cs:fontRef>
-    <cs:defRPr sz="1330" kern="1200"/>
-  </cs:axisTitle>
-  <cs:categoryAxis>
-    <cs:lnRef idx="0"/>
-    <cs:fillRef idx="0"/>
-    <cs:effectRef idx="0"/>
-    <cs:fontRef idx="minor">
-      <a:schemeClr val="tx1">
-        <a:lumMod val="65000"/>
-        <a:lumOff val="35000"/>
-      </a:schemeClr>
-    </cs:fontRef>
-    <cs:spPr>
-      <a:ln w="9525" cap="flat" cmpd="sng" algn="ctr">
-        <a:solidFill>
-          <a:schemeClr val="tx1">
-            <a:lumMod val="15000"/>
-            <a:lumOff val="85000"/>
-          </a:schemeClr>
-        </a:solidFill>
-        <a:round/>
-      </a:ln>
-    </cs:spPr>
-    <cs:defRPr sz="1195" kern="1200"/>
-  </cs:categoryAxis>
-  <cs:chartArea mods="allowNoFillOverride allowNoLineOverride">
-    <cs:lnRef idx="0"/>
-    <cs:fillRef idx="0"/>
-    <cs:effectRef idx="0"/>
-    <cs:fontRef idx="minor">
-      <a:schemeClr val="tx1"/>
-    </cs:fontRef>
-    <cs:spPr>
-      <a:solidFill>
-        <a:schemeClr val="bg1"/>
-      </a:solidFill>
-      <a:ln w="9525" cap="flat" cmpd="sng" algn="ctr">
-        <a:solidFill>
-          <a:schemeClr val="tx1">
-            <a:lumMod val="15000"/>
-            <a:lumOff val="85000"/>
-          </a:schemeClr>
-        </a:solidFill>
-        <a:round/>
-      </a:ln>
-    </cs:spPr>
-    <cs:defRPr sz="1195" kern="1200"/>
-  </cs:chartArea>
-  <cs:dataLabel>
-    <cs:lnRef idx="0"/>
-    <cs:fillRef idx="0"/>
-    <cs:effectRef idx="0"/>
-    <cs:fontRef idx="minor">
-      <a:schemeClr val="tx1">
-        <a:lumMod val="75000"/>
-        <a:lumOff val="25000"/>
-      </a:schemeClr>
-    </cs:fontRef>
-    <cs:defRPr sz="1195" kern="1200"/>
-  </cs:dataLabel>
-  <cs:dataLabelCallout>
-    <cs:lnRef idx="0"/>
-    <cs:fillRef idx="0"/>
-    <cs:effectRef idx="0"/>
-    <cs:fontRef idx="minor">
-      <a:schemeClr val="dk1">
-        <a:lumMod val="65000"/>
-        <a:lumOff val="35000"/>
-      </a:schemeClr>
-    </cs:fontRef>
-    <cs:spPr>
-      <a:solidFill>
-        <a:schemeClr val="lt1"/>
-      </a:solidFill>
-      <a:ln>
-        <a:solidFill>
-          <a:schemeClr val="dk1">
-            <a:lumMod val="25000"/>
-            <a:lumOff val="75000"/>
-          </a:schemeClr>
-        </a:solidFill>
-      </a:ln>
-    </cs:spPr>
-    <cs:defRPr sz="1195" kern="1200"/>
-    <cs:bodyPr rot="0" spcFirstLastPara="1" vertOverflow="clip" horzOverflow="clip" vert="horz" wrap="square" lIns="36576" tIns="18288" rIns="36576" bIns="18288" anchor="ctr" anchorCtr="1">
-      <a:spAutoFit/>
-    </cs:bodyPr>
-  </cs:dataLabelCallout>
-  <cs:dataPoint>
-    <cs:lnRef idx="0"/>
-    <cs:fillRef idx="1">
-      <cs:styleClr val="auto"/>
-    </cs:fillRef>
-    <cs:effectRef idx="0"/>
-    <cs:fontRef idx="minor">
-      <a:schemeClr val="tx1"/>
-    </cs:fontRef>
-    <cs:spPr>
-      <a:ln w="19050">
-        <a:solidFill>
-          <a:schemeClr val="lt1"/>
-        </a:solidFill>
-      </a:ln>
-    </cs:spPr>
-  </cs:dataPoint>
-  <cs:dataPoint3D>
-    <cs:lnRef idx="0"/>
-    <cs:fillRef idx="1">
-      <cs:styleClr val="auto"/>
-    </cs:fillRef>
-    <cs:effectRef idx="0"/>
-    <cs:fontRef idx="minor">
-      <a:schemeClr val="tx1"/>
-    </cs:fontRef>
-    <cs:spPr>
-      <a:ln w="25400">
-        <a:solidFill>
-          <a:schemeClr val="lt1"/>
-        </a:solidFill>
-      </a:ln>
-    </cs:spPr>
-  </cs:dataPoint3D>
-  <cs:dataPointLine>
-    <cs:lnRef idx="0">
-      <cs:styleClr val="auto"/>
-    </cs:lnRef>
-    <cs:fillRef idx="0"/>
-    <cs:effectRef idx="0"/>
-    <cs:fontRef idx="minor">
-      <a:schemeClr val="tx1"/>
-    </cs:fontRef>
-    <cs:spPr>
-      <a:ln w="28575" cap="rnd">
-        <a:solidFill>
-          <a:schemeClr val="phClr"/>
-        </a:solidFill>
-        <a:round/>
-      </a:ln>
-    </cs:spPr>
-  </cs:dataPointLine>
-  <cs:dataPointMarker>
-    <cs:lnRef idx="0">
-      <cs:styleClr val="auto"/>
-    </cs:lnRef>
-    <cs:fillRef idx="1">
-      <cs:styleClr val="auto"/>
-    </cs:fillRef>
-    <cs:effectRef idx="0"/>
-    <cs:fontRef idx="minor">
-      <a:schemeClr val="tx1"/>
-    </cs:fontRef>
-    <cs:spPr>
-      <a:ln w="9525">
-        <a:solidFill>
-          <a:schemeClr val="phClr"/>
-        </a:solidFill>
-      </a:ln>
-    </cs:spPr>
-  </cs:dataPointMarker>
-  <cs:dataPointMarkerLayout symbol="circle" size="5"/>
-  <cs:dataPointWireframe>
-    <cs:lnRef idx="0">
-      <cs:styleClr val="auto"/>
-    </cs:lnRef>
-    <cs:fillRef idx="0"/>
-    <cs:effectRef idx="0"/>
-    <cs:fontRef idx="minor">
-      <a:schemeClr val="tx1"/>
-    </cs:fontRef>
-    <cs:spPr>
-      <a:ln w="9525" cap="rnd">
-        <a:solidFill>
-          <a:schemeClr val="phClr"/>
-        </a:solidFill>
-        <a:round/>
-      </a:ln>
-    </cs:spPr>
-  </cs:dataPointWireframe>
-  <cs:dataTable>
-    <cs:lnRef idx="0"/>
-    <cs:fillRef idx="0"/>
-    <cs:effectRef idx="0"/>
-    <cs:fontRef idx="minor">
-      <a:schemeClr val="tx1">
-        <a:lumMod val="65000"/>
-        <a:lumOff val="35000"/>
-      </a:schemeClr>
-    </cs:fontRef>
-    <cs:spPr>
-      <a:noFill/>
-      <a:ln w="9525" cap="flat" cmpd="sng" algn="ctr">
-        <a:solidFill>
-          <a:schemeClr val="tx1">
-            <a:lumMod val="15000"/>
-            <a:lumOff val="85000"/>
-          </a:schemeClr>
-        </a:solidFill>
-        <a:round/>
-      </a:ln>
-    </cs:spPr>
-    <cs:defRPr sz="1195" kern="1200"/>
-  </cs:dataTable>
-  <cs:downBar>
-    <cs:lnRef idx="0"/>
-    <cs:fillRef idx="0"/>
-    <cs:effectRef idx="0"/>
-    <cs:fontRef idx="minor">
-      <a:schemeClr val="tx1"/>
-    </cs:fontRef>
-    <cs:spPr>
-      <a:solidFill>
-        <a:schemeClr val="dk1">
-          <a:lumMod val="75000"/>
-          <a:lumOff val="25000"/>
-        </a:schemeClr>
-      </a:solidFill>
-      <a:ln w="9525" cap="flat" cmpd="sng" algn="ctr">
-        <a:solidFill>
-          <a:schemeClr val="tx1">
-            <a:lumMod val="65000"/>
-            <a:lumOff val="35000"/>
-          </a:schemeClr>
-        </a:solidFill>
-        <a:round/>
-      </a:ln>
-    </cs:spPr>
-  </cs:downBar>
-  <cs:dropLine>
-    <cs:lnRef idx="0"/>
-    <cs:fillRef idx="0"/>
-    <cs:effectRef idx="0"/>
-    <cs:fontRef idx="minor">
-      <a:schemeClr val="tx1"/>
-    </cs:fontRef>
-    <cs:spPr>
-      <a:ln w="9525" cap="flat" cmpd="sng" algn="ctr">
-        <a:solidFill>
-          <a:schemeClr val="tx1">
-            <a:lumMod val="35000"/>
-            <a:lumOff val="65000"/>
-          </a:schemeClr>
-        </a:solidFill>
-        <a:round/>
-      </a:ln>
-    </cs:spPr>
-  </cs:dropLine>
-  <cs:errorBar>
-    <cs:lnRef idx="0"/>
-    <cs:fillRef idx="0"/>
-    <cs:effectRef idx="0"/>
-    <cs:fontRef idx="minor">
-      <a:schemeClr val="tx1"/>
-    </cs:fontRef>
-    <cs:spPr>
-      <a:ln w="9525" cap="flat" cmpd="sng" algn="ctr">
-        <a:solidFill>
-          <a:schemeClr val="tx1">
-            <a:lumMod val="65000"/>
-            <a:lumOff val="35000"/>
-          </a:schemeClr>
-        </a:solidFill>
-        <a:round/>
-      </a:ln>
-    </cs:spPr>
-  </cs:errorBar>
-  <cs:floor>
-    <cs:lnRef idx="0"/>
-    <cs:fillRef idx="0"/>
-    <cs:effectRef idx="0"/>
-    <cs:fontRef idx="minor">
-      <a:schemeClr val="tx1"/>
-    </cs:fontRef>
-    <cs:spPr>
-      <a:noFill/>
-      <a:ln>
-        <a:noFill/>
-      </a:ln>
-    </cs:spPr>
-  </cs:floor>
-  <cs:gridlineMajor>
-    <cs:lnRef idx="0"/>
-    <cs:fillRef idx="0"/>
-    <cs:effectRef idx="0"/>
-    <cs:fontRef idx="minor">
-      <a:schemeClr val="tx1"/>
-    </cs:fontRef>
-    <cs:spPr>
-      <a:ln w="9525" cap="flat" cmpd="sng" algn="ctr">
-        <a:solidFill>
-          <a:schemeClr val="tx1">
-            <a:lumMod val="15000"/>
-            <a:lumOff val="85000"/>
-          </a:schemeClr>
-        </a:solidFill>
-        <a:round/>
-      </a:ln>
-    </cs:spPr>
-  </cs:gridlineMajor>
-  <cs:gridlineMinor>
-    <cs:lnRef idx="0"/>
-    <cs:fillRef idx="0"/>
-    <cs:effectRef idx="0"/>
-    <cs:fontRef idx="minor">
-      <a:schemeClr val="tx1"/>
-    </cs:fontRef>
-    <cs:spPr>
-      <a:ln w="9525" cap="flat" cmpd="sng" algn="ctr">
-        <a:solidFill>
-          <a:schemeClr val="tx1">
-            <a:lumMod val="5000"/>
-            <a:lumOff val="95000"/>
-          </a:schemeClr>
-        </a:solidFill>
-        <a:round/>
-      </a:ln>
-    </cs:spPr>
-  </cs:gridlineMinor>
-  <cs:hiLoLine>
-    <cs:lnRef idx="0"/>
-    <cs:fillRef idx="0"/>
-    <cs:effectRef idx="0"/>
-    <cs:fontRef idx="minor">
-      <a:schemeClr val="tx1"/>
-    </cs:fontRef>
-    <cs:spPr>
-      <a:ln w="9525" cap="flat" cmpd="sng" algn="ctr">
-        <a:solidFill>
-          <a:schemeClr val="tx1">
-            <a:lumMod val="50000"/>
-            <a:lumOff val="50000"/>
-          </a:schemeClr>
-        </a:solidFill>
-        <a:round/>
-      </a:ln>
-    </cs:spPr>
-  </cs:hiLoLine>
-  <cs:leaderLine>
-    <cs:lnRef idx="0"/>
-    <cs:fillRef idx="0"/>
-    <cs:effectRef idx="0"/>
-    <cs:fontRef idx="minor">
-      <a:schemeClr val="tx1"/>
-    </cs:fontRef>
-    <cs:spPr>
-      <a:ln w="9525" cap="flat" cmpd="sng" algn="ctr">
-        <a:solidFill>
-          <a:schemeClr val="tx1">
-            <a:lumMod val="35000"/>
-            <a:lumOff val="65000"/>
-          </a:schemeClr>
-        </a:solidFill>
-        <a:round/>
-      </a:ln>
-    </cs:spPr>
-  </cs:leaderLine>
-  <cs:legend>
-    <cs:lnRef idx="0"/>
-    <cs:fillRef idx="0"/>
-    <cs:effectRef idx="0"/>
-    <cs:fontRef idx="minor">
-      <a:schemeClr val="tx1">
-        <a:lumMod val="65000"/>
-        <a:lumOff val="35000"/>
-      </a:schemeClr>
-    </cs:fontRef>
-    <cs:defRPr sz="1195" kern="1200"/>
-  </cs:legend>
-  <cs:plotArea mods="allowNoFillOverride allowNoLineOverride">
-    <cs:lnRef idx="0"/>
-    <cs:fillRef idx="0"/>
-    <cs:effectRef idx="0"/>
-    <cs:fontRef idx="minor">
-      <a:schemeClr val="tx1"/>
-    </cs:fontRef>
-  </cs:plotArea>
-  <cs:plotArea3D mods="allowNoFillOverride allowNoLineOverride">
-    <cs:lnRef idx="0"/>
-    <cs:fillRef idx="0"/>
-    <cs:effectRef idx="0"/>
-    <cs:fontRef idx="minor">
-      <a:schemeClr val="tx1"/>
-    </cs:fontRef>
-  </cs:plotArea3D>
-  <cs:seriesAxis>
-    <cs:lnRef idx="0"/>
-    <cs:fillRef idx="0"/>
-    <cs:effectRef idx="0"/>
-    <cs:fontRef idx="minor">
-      <a:schemeClr val="tx1">
-        <a:lumMod val="65000"/>
-        <a:lumOff val="35000"/>
-      </a:schemeClr>
-    </cs:fontRef>
-    <cs:defRPr sz="1195" kern="1200"/>
-  </cs:seriesAxis>
-  <cs:seriesLine>
-    <cs:lnRef idx="0"/>
-    <cs:fillRef idx="0"/>
-    <cs:effectRef idx="0"/>
-    <cs:fontRef idx="minor">
-      <a:schemeClr val="tx1"/>
-    </cs:fontRef>
-    <cs:spPr>
-      <a:ln w="9525" cap="flat" cmpd="sng" algn="ctr">
-        <a:solidFill>
-          <a:schemeClr val="tx1">
-            <a:lumMod val="35000"/>
-            <a:lumOff val="65000"/>
-          </a:schemeClr>
-        </a:solidFill>
-        <a:round/>
-      </a:ln>
-    </cs:spPr>
-  </cs:seriesLine>
-  <cs:title>
-    <cs:lnRef idx="0"/>
-    <cs:fillRef idx="0"/>
-    <cs:effectRef idx="0"/>
-    <cs:fontRef idx="minor">
-      <a:schemeClr val="tx1">
-        <a:lumMod val="65000"/>
-        <a:lumOff val="35000"/>
-      </a:schemeClr>
-    </cs:fontRef>
-    <cs:defRPr sz="1860" b="0" kern="1200" spc="0" baseline="0"/>
-  </cs:title>
-  <cs:trendline>
-    <cs:lnRef idx="0">
-      <cs:styleClr val="auto"/>
-    </cs:lnRef>
-    <cs:fillRef idx="0"/>
-    <cs:effectRef idx="0"/>
-    <cs:fontRef idx="minor">
-      <a:schemeClr val="tx1"/>
-    </cs:fontRef>
-    <cs:spPr>
-      <a:ln w="19050" cap="rnd">
-        <a:solidFill>
-          <a:schemeClr val="phClr"/>
-        </a:solidFill>
-        <a:prstDash val="sysDot"/>
-      </a:ln>
-    </cs:spPr>
-  </cs:trendline>
-  <cs:trendlineLabel>
-    <cs:lnRef idx="0"/>
-    <cs:fillRef idx="0"/>
-    <cs:effectRef idx="0"/>
-    <cs:fontRef idx="minor">
-      <a:schemeClr val="tx1">
-        <a:lumMod val="65000"/>
-        <a:lumOff val="35000"/>
-      </a:schemeClr>
-    </cs:fontRef>
-    <cs:defRPr sz="1195" kern="1200"/>
-  </cs:trendlineLabel>
-  <cs:upBar>
-    <cs:lnRef idx="0"/>
-    <cs:fillRef idx="0"/>
-    <cs:effectRef idx="0"/>
-    <cs:fontRef idx="minor">
-      <a:schemeClr val="tx1"/>
-    </cs:fontRef>
-    <cs:spPr>
-      <a:solidFill>
-        <a:schemeClr val="lt1"/>
-      </a:solidFill>
-      <a:ln w="9525" cap="flat" cmpd="sng" algn="ctr">
-        <a:solidFill>
-          <a:schemeClr val="tx1">
-            <a:lumMod val="65000"/>
-            <a:lumOff val="35000"/>
-          </a:schemeClr>
-        </a:solidFill>
-        <a:round/>
-      </a:ln>
-    </cs:spPr>
-  </cs:upBar>
-  <cs:valueAxis>
-    <cs:lnRef idx="0"/>
-    <cs:fillRef idx="0"/>
-    <cs:effectRef idx="0"/>
-    <cs:fontRef idx="minor">
-      <a:schemeClr val="tx1">
-        <a:lumMod val="65000"/>
-        <a:lumOff val="35000"/>
-      </a:schemeClr>
-    </cs:fontRef>
-    <cs:defRPr sz="1195" kern="1200"/>
-  </cs:valueAxis>
-  <cs:wall>
-    <cs:lnRef idx="0"/>
-    <cs:fillRef idx="0"/>
-    <cs:effectRef idx="0"/>
-    <cs:fontRef idx="minor">
-      <a:schemeClr val="tx1"/>
-    </cs:fontRef>
-    <cs:spPr>
-      <a:noFill/>
-      <a:ln>
-        <a:noFill/>
-      </a:ln>
-    </cs:spPr>
-  </cs:wall>
-</cs:chartStyle>
-</file>
-
-<file path=ppt/charts/style2.xml><?xml version="1.0" encoding="utf-8"?>
-<cs:chartStyle xmlns:cs="http://schemas.microsoft.com/office/drawing/2012/chartStyle" xmlns:a="http://schemas.openxmlformats.org/drawingml/2006/main" id="258">
-  <cs:axisTitle>
-    <cs:lnRef idx="0"/>
-    <cs:fillRef idx="0"/>
-    <cs:effectRef idx="0"/>
-    <cs:fontRef idx="minor">
-      <a:schemeClr val="tx1">
-        <a:lumMod val="65000"/>
-        <a:lumOff val="35000"/>
-      </a:schemeClr>
-    </cs:fontRef>
-    <cs:defRPr sz="1195" kern="1200"/>
-  </cs:axisTitle>
-  <cs:categoryAxis>
-    <cs:lnRef idx="0"/>
-    <cs:fillRef idx="0"/>
-    <cs:effectRef idx="0"/>
-    <cs:fontRef idx="minor">
-      <a:schemeClr val="tx1">
-        <a:lumMod val="65000"/>
-        <a:lumOff val="35000"/>
-      </a:schemeClr>
-    </cs:fontRef>
-    <cs:defRPr sz="1195" kern="1200"/>
-  </cs:categoryAxis>
-  <cs:chartArea mods="allowNoFillOverride allowNoLineOverride">
-    <cs:lnRef idx="0"/>
-    <cs:fillRef idx="0"/>
-    <cs:effectRef idx="0"/>
-    <cs:fontRef idx="minor">
-      <a:schemeClr val="tx1"/>
-    </cs:fontRef>
-    <cs:spPr>
-      <a:solidFill>
-        <a:schemeClr val="bg1"/>
-      </a:solidFill>
-      <a:ln w="9525" cap="flat" cmpd="sng" algn="ctr">
-        <a:solidFill>
-          <a:schemeClr val="tx1">
-            <a:lumMod val="15000"/>
-            <a:lumOff val="85000"/>
-          </a:schemeClr>
-        </a:solidFill>
-        <a:round/>
-      </a:ln>
-    </cs:spPr>
-    <cs:defRPr sz="1195" kern="1200"/>
-  </cs:chartArea>
-  <cs:dataLabel>
-    <cs:lnRef idx="0"/>
-    <cs:fillRef idx="0"/>
-    <cs:effectRef idx="0"/>
-    <cs:fontRef idx="minor">
-      <a:schemeClr val="lt1"/>
-    </cs:fontRef>
-    <cs:defRPr sz="1195" b="1" kern="1200"/>
-  </cs:dataLabel>
-  <cs:dataLabelCallout>
-    <cs:lnRef idx="0"/>
-    <cs:fillRef idx="0"/>
-    <cs:effectRef idx="0"/>
-    <cs:fontRef idx="minor">
-      <a:schemeClr val="dk1">
-        <a:lumMod val="65000"/>
-        <a:lumOff val="35000"/>
-      </a:schemeClr>
-    </cs:fontRef>
-    <cs:spPr>
-      <a:solidFill>
-        <a:schemeClr val="lt1"/>
-      </a:solidFill>
-      <a:ln>
-        <a:solidFill>
-          <a:schemeClr val="dk1">
-            <a:lumMod val="25000"/>
-            <a:lumOff val="75000"/>
-          </a:schemeClr>
-        </a:solidFill>
-      </a:ln>
-    </cs:spPr>
-    <cs:defRPr sz="1195" kern="1200"/>
-    <cs:bodyPr rot="0" spcFirstLastPara="1" vertOverflow="clip" horzOverflow="clip" vert="horz" wrap="square" lIns="36576" tIns="18288" rIns="36576" bIns="18288" anchor="ctr" anchorCtr="1">
-      <a:spAutoFit/>
-    </cs:bodyPr>
-  </cs:dataLabelCallout>
-  <cs:dataPoint>
-    <cs:lnRef idx="0"/>
-    <cs:fillRef idx="0">
-      <cs:styleClr val="auto"/>
-    </cs:fillRef>
-    <cs:effectRef idx="0"/>
-    <cs:fontRef idx="minor">
-      <a:schemeClr val="tx1"/>
-    </cs:fontRef>
-    <cs:spPr>
-      <a:solidFill>
-        <a:schemeClr val="phClr"/>
-      </a:solidFill>
-      <a:scene3d>
-        <a:camera prst="orthographicFront"/>
-        <a:lightRig rig="brightRoom" dir="t"/>
-      </a:scene3d>
-      <a:sp3d prstMaterial="flat">
-        <a:bevelT w="50800" h="101600" prst="angle"/>
-        <a:contourClr>
-          <a:srgbClr val="000000"/>
-        </a:contourClr>
-      </a:sp3d>
-    </cs:spPr>
-  </cs:dataPoint>
-  <cs:dataPoint3D>
-    <cs:lnRef idx="0"/>
-    <cs:fillRef idx="0">
-      <cs:styleClr val="auto"/>
-    </cs:fillRef>
-    <cs:effectRef idx="0"/>
-    <cs:fontRef idx="minor">
-      <a:schemeClr val="tx1"/>
-    </cs:fontRef>
-    <cs:spPr>
-      <a:solidFill>
-        <a:schemeClr val="phClr"/>
-      </a:solidFill>
-      <a:ln w="19050">
-        <a:solidFill>
-          <a:schemeClr val="lt1"/>
-        </a:solidFill>
-      </a:ln>
-    </cs:spPr>
-  </cs:dataPoint3D>
-  <cs:dataPointLine>
-    <cs:lnRef idx="0">
-      <cs:styleClr val="auto"/>
-    </cs:lnRef>
-    <cs:fillRef idx="0"/>
-    <cs:effectRef idx="0"/>
-    <cs:fontRef idx="minor">
-      <a:schemeClr val="tx1"/>
-    </cs:fontRef>
-    <cs:spPr>
-      <a:ln w="28575" cap="rnd">
-        <a:solidFill>
-          <a:schemeClr val="phClr"/>
-        </a:solidFill>
-        <a:round/>
-      </a:ln>
-    </cs:spPr>
-  </cs:dataPointLine>
-  <cs:dataPointMarker>
-    <cs:lnRef idx="0"/>
-    <cs:fillRef idx="0">
-      <cs:styleClr val="auto"/>
-    </cs:fillRef>
-    <cs:effectRef idx="0"/>
-    <cs:fontRef idx="minor">
-      <a:schemeClr val="tx1"/>
-    </cs:fontRef>
-    <cs:spPr>
-      <a:solidFill>
-        <a:schemeClr val="phClr"/>
-      </a:solidFill>
-      <a:ln w="9525">
-        <a:solidFill>
-          <a:schemeClr val="lt1"/>
-        </a:solidFill>
-      </a:ln>
-    </cs:spPr>
-  </cs:dataPointMarker>
-  <cs:dataPointMarkerLayout symbol="circle" size="6"/>
-  <cs:dataPointWireframe>
-    <cs:lnRef idx="0">
-      <cs:styleClr val="auto"/>
-    </cs:lnRef>
-    <cs:fillRef idx="0"/>
-    <cs:effectRef idx="0"/>
-    <cs:fontRef idx="minor">
-      <a:schemeClr val="tx1"/>
-    </cs:fontRef>
-    <cs:spPr>
-      <a:ln w="9525" cap="rnd">
-        <a:solidFill>
-          <a:schemeClr val="phClr"/>
-        </a:solidFill>
-        <a:round/>
-      </a:ln>
-    </cs:spPr>
-  </cs:dataPointWireframe>
-  <cs:dataTable>
-    <cs:lnRef idx="0"/>
-    <cs:fillRef idx="0"/>
-    <cs:effectRef idx="0"/>
-    <cs:fontRef idx="minor">
-      <a:schemeClr val="tx1">
-        <a:lumMod val="65000"/>
-        <a:lumOff val="35000"/>
-      </a:schemeClr>
-    </cs:fontRef>
-    <cs:spPr>
-      <a:noFill/>
-      <a:ln w="9525" cap="flat" cmpd="sng" algn="ctr">
-        <a:solidFill>
-          <a:schemeClr val="tx1">
-            <a:lumMod val="15000"/>
-            <a:lumOff val="85000"/>
-          </a:schemeClr>
-        </a:solidFill>
-        <a:round/>
-      </a:ln>
-    </cs:spPr>
-    <cs:defRPr sz="1195" kern="1200"/>
-  </cs:dataTable>
-  <cs:downBar>
-    <cs:lnRef idx="0"/>
-    <cs:fillRef idx="0"/>
-    <cs:effectRef idx="0"/>
-    <cs:fontRef idx="minor">
-      <a:schemeClr val="tx1"/>
-    </cs:fontRef>
-    <cs:spPr>
-      <a:solidFill>
-        <a:schemeClr val="dk1">
-          <a:lumMod val="75000"/>
-          <a:lumOff val="25000"/>
-        </a:schemeClr>
-      </a:solidFill>
-      <a:ln w="9525" cap="flat" cmpd="sng" algn="ctr">
-        <a:solidFill>
-          <a:schemeClr val="tx1">
-            <a:lumMod val="65000"/>
-            <a:lumOff val="35000"/>
-          </a:schemeClr>
-        </a:solidFill>
-        <a:round/>
-      </a:ln>
-    </cs:spPr>
-  </cs:downBar>
-  <cs:dropLine>
-    <cs:lnRef idx="0"/>
-    <cs:fillRef idx="0"/>
-    <cs:effectRef idx="0"/>
-    <cs:fontRef idx="minor">
-      <a:schemeClr val="tx1"/>
-    </cs:fontRef>
-    <cs:spPr>
-      <a:ln w="9525" cap="flat" cmpd="sng" algn="ctr">
-        <a:solidFill>
-          <a:schemeClr val="tx1">
-            <a:lumMod val="35000"/>
-            <a:lumOff val="65000"/>
-          </a:schemeClr>
-        </a:solidFill>
-        <a:round/>
-      </a:ln>
-    </cs:spPr>
-  </cs:dropLine>
-  <cs:errorBar>
-    <cs:lnRef idx="0"/>
-    <cs:fillRef idx="0"/>
-    <cs:effectRef idx="0"/>
-    <cs:fontRef idx="minor">
-      <a:schemeClr val="tx1"/>
-    </cs:fontRef>
-    <cs:spPr>
-      <a:ln w="9525" cap="flat" cmpd="sng" algn="ctr">
-        <a:solidFill>
-          <a:schemeClr val="tx1">
-            <a:lumMod val="65000"/>
-            <a:lumOff val="35000"/>
-          </a:schemeClr>
-        </a:solidFill>
-        <a:round/>
-      </a:ln>
-    </cs:spPr>
-  </cs:errorBar>
-  <cs:floor>
-    <cs:lnRef idx="0"/>
-    <cs:fillRef idx="0"/>
-    <cs:effectRef idx="0"/>
-    <cs:fontRef idx="minor">
-      <a:schemeClr val="tx1"/>
-    </cs:fontRef>
-    <cs:spPr>
-      <a:noFill/>
-      <a:ln>
-        <a:noFill/>
-      </a:ln>
-    </cs:spPr>
-  </cs:floor>
-  <cs:gridlineMajor>
-    <cs:lnRef idx="0"/>
-    <cs:fillRef idx="0"/>
-    <cs:effectRef idx="0"/>
-    <cs:fontRef idx="minor">
-      <a:schemeClr val="tx1"/>
-    </cs:fontRef>
-    <cs:spPr>
-      <a:ln w="9525" cap="flat" cmpd="sng" algn="ctr">
-        <a:solidFill>
-          <a:schemeClr val="tx1">
-            <a:lumMod val="15000"/>
-            <a:lumOff val="85000"/>
-          </a:schemeClr>
-        </a:solidFill>
-        <a:round/>
-      </a:ln>
-    </cs:spPr>
-  </cs:gridlineMajor>
-  <cs:gridlineMinor>
-    <cs:lnRef idx="0"/>
-    <cs:fillRef idx="0"/>
-    <cs:effectRef idx="0"/>
-    <cs:fontRef idx="minor">
-      <a:schemeClr val="tx1"/>
-    </cs:fontRef>
-    <cs:spPr>
-      <a:ln w="9525" cap="flat" cmpd="sng" algn="ctr">
-        <a:solidFill>
-          <a:schemeClr val="tx1">
-            <a:lumMod val="5000"/>
-            <a:lumOff val="95000"/>
-          </a:schemeClr>
-        </a:solidFill>
-        <a:round/>
-      </a:ln>
-    </cs:spPr>
-  </cs:gridlineMinor>
-  <cs:hiLoLine>
-    <cs:lnRef idx="0"/>
-    <cs:fillRef idx="0"/>
-    <cs:effectRef idx="0"/>
-    <cs:fontRef idx="minor">
-      <a:schemeClr val="tx1"/>
-    </cs:fontRef>
-    <cs:spPr>
-      <a:ln w="9525" cap="flat" cmpd="sng" algn="ctr">
-        <a:solidFill>
-          <a:schemeClr val="tx1">
-            <a:lumMod val="50000"/>
-            <a:lumOff val="50000"/>
-          </a:schemeClr>
-        </a:solidFill>
-        <a:round/>
-      </a:ln>
-    </cs:spPr>
-  </cs:hiLoLine>
-  <cs:leaderLine>
-    <cs:lnRef idx="0"/>
-    <cs:fillRef idx="0"/>
-    <cs:effectRef idx="0"/>
-    <cs:fontRef idx="minor">
-      <a:schemeClr val="tx1"/>
-    </cs:fontRef>
-    <cs:spPr>
-      <a:ln w="9525" cap="flat" cmpd="sng" algn="ctr">
-        <a:solidFill>
-          <a:schemeClr val="tx1">
-            <a:lumMod val="35000"/>
-            <a:lumOff val="65000"/>
-          </a:schemeClr>
-        </a:solidFill>
-        <a:round/>
-      </a:ln>
-    </cs:spPr>
-  </cs:leaderLine>
-  <cs:legend>
-    <cs:lnRef idx="0"/>
-    <cs:fillRef idx="0"/>
-    <cs:effectRef idx="0"/>
-    <cs:fontRef idx="minor">
-      <a:schemeClr val="tx1">
-        <a:lumMod val="65000"/>
-        <a:lumOff val="35000"/>
-      </a:schemeClr>
-    </cs:fontRef>
-    <cs:defRPr sz="1195" kern="1200"/>
-  </cs:legend>
-  <cs:plotArea mods="allowNoFillOverride allowNoLineOverride">
-    <cs:lnRef idx="0"/>
-    <cs:fillRef idx="0"/>
-    <cs:effectRef idx="0"/>
-    <cs:fontRef idx="minor">
-      <a:schemeClr val="tx1"/>
-    </cs:fontRef>
-  </cs:plotArea>
-  <cs:plotArea3D mods="allowNoFillOverride allowNoLineOverride">
-    <cs:lnRef idx="0"/>
-    <cs:fillRef idx="0"/>
-    <cs:effectRef idx="0"/>
-    <cs:fontRef idx="minor">
-      <a:schemeClr val="tx1"/>
-    </cs:fontRef>
-  </cs:plotArea3D>
-  <cs:seriesAxis>
-    <cs:lnRef idx="0"/>
-    <cs:fillRef idx="0"/>
-    <cs:effectRef idx="0"/>
-    <cs:fontRef idx="minor">
-      <a:schemeClr val="tx1">
-        <a:lumMod val="65000"/>
-        <a:lumOff val="35000"/>
-      </a:schemeClr>
-    </cs:fontRef>
-    <cs:defRPr sz="1195" kern="1200"/>
-  </cs:seriesAxis>
-  <cs:seriesLine>
-    <cs:lnRef idx="0"/>
-    <cs:fillRef idx="0"/>
-    <cs:effectRef idx="0"/>
-    <cs:fontRef idx="minor">
-      <a:schemeClr val="tx1"/>
-    </cs:fontRef>
-    <cs:spPr>
-      <a:ln w="9525" cap="flat" cmpd="sng" algn="ctr">
-        <a:solidFill>
-          <a:schemeClr val="tx1">
-            <a:lumMod val="35000"/>
-            <a:lumOff val="65000"/>
-          </a:schemeClr>
-        </a:solidFill>
-        <a:round/>
-      </a:ln>
-    </cs:spPr>
-  </cs:seriesLine>
-  <cs:title>
-    <cs:lnRef idx="0"/>
-    <cs:fillRef idx="0"/>
-    <cs:effectRef idx="0"/>
-    <cs:fontRef idx="minor">
-      <a:schemeClr val="tx1">
-        <a:lumMod val="65000"/>
-        <a:lumOff val="35000"/>
-      </a:schemeClr>
-    </cs:fontRef>
-    <cs:defRPr sz="1860" b="1" i="0" kern="1200" cap="all" spc="50" baseline="0"/>
-  </cs:title>
-  <cs:trendline>
-    <cs:lnRef idx="0">
-      <cs:styleClr val="auto"/>
-    </cs:lnRef>
-    <cs:fillRef idx="0"/>
-    <cs:effectRef idx="0"/>
-    <cs:fontRef idx="minor">
-      <a:schemeClr val="tx1"/>
-    </cs:fontRef>
-    <cs:spPr>
-      <a:ln w="19050" cap="rnd">
-        <a:solidFill>
-          <a:schemeClr val="phClr"/>
-        </a:solidFill>
-        <a:prstDash val="sysDash"/>
-      </a:ln>
-    </cs:spPr>
-  </cs:trendline>
-  <cs:trendlineLabel>
-    <cs:lnRef idx="0"/>
-    <cs:fillRef idx="0"/>
-    <cs:effectRef idx="0"/>
-    <cs:fontRef idx="minor">
-      <a:schemeClr val="tx1">
-        <a:lumMod val="65000"/>
-        <a:lumOff val="35000"/>
-      </a:schemeClr>
-    </cs:fontRef>
-    <cs:defRPr sz="1195" kern="1200"/>
-  </cs:trendlineLabel>
-  <cs:upBar>
-    <cs:lnRef idx="0"/>
-    <cs:fillRef idx="0"/>
-    <cs:effectRef idx="0"/>
-    <cs:fontRef idx="minor">
-      <a:schemeClr val="tx1"/>
-    </cs:fontRef>
-    <cs:spPr>
-      <a:solidFill>
-        <a:schemeClr val="lt1"/>
-      </a:solidFill>
-      <a:ln w="9525" cap="flat" cmpd="sng" algn="ctr">
-        <a:solidFill>
-          <a:schemeClr val="tx1">
-            <a:lumMod val="65000"/>
-            <a:lumOff val="35000"/>
-          </a:schemeClr>
-        </a:solidFill>
-        <a:round/>
-      </a:ln>
-    </cs:spPr>
-  </cs:upBar>
-  <cs:valueAxis>
-    <cs:lnRef idx="0"/>
-    <cs:fillRef idx="0"/>
-    <cs:effectRef idx="0"/>
-    <cs:fontRef idx="minor">
-      <a:schemeClr val="tx1">
-        <a:lumMod val="65000"/>
-        <a:lumOff val="35000"/>
-      </a:schemeClr>
-    </cs:fontRef>
-    <cs:defRPr sz="1195" kern="1200"/>
-  </cs:valueAxis>
-  <cs:wall>
-    <cs:lnRef idx="0"/>
-    <cs:fillRef idx="0"/>
-    <cs:effectRef idx="0"/>
-    <cs:fontRef idx="minor">
-      <a:schemeClr val="tx1"/>
-    </cs:fontRef>
-    <cs:spPr>
-      <a:noFill/>
-      <a:ln>
-        <a:noFill/>
-      </a:ln>
-    </cs:spPr>
-  </cs:wall>
-</cs:chartStyle>
-</file>
-
 <file path=ppt/notesMasters/notesMaster1.xml><?xml version="1.0" encoding="utf-8"?>
 <p:notesMaster xmlns:a="http://schemas.openxmlformats.org/drawingml/2006/main" xmlns:r="http://schemas.openxmlformats.org/officeDocument/2006/relationships" xmlns:p="http://schemas.openxmlformats.org/presentationml/2006/main">
   <p:cSld>
@@ -2854,7 +374,7 @@
             </a:pPr>
             <a:fld id="{C4A5D341-4EBE-4A71-8129-9C53C0EA2457}" type="datetimeFigureOut">
               <a:rPr lang="pt-BR"/>
-              <a:t>09/09/2026</a:t>
+              <a:t>15/09/2026</a:t>
             </a:fld>
             <a:endParaRPr lang="pt-BR"/>
           </a:p>
@@ -3411,7 +931,7 @@
             </a:pPr>
             <a:fld id="{4FBEB365-19CE-49BC-A87B-5FAE5E1096C2}" type="datetimeFigureOut">
               <a:rPr lang="pt-BR" altLang="pt-BR"/>
-              <a:t>09/09/2026</a:t>
+              <a:t>15/09/2026</a:t>
             </a:fld>
             <a:endParaRPr lang="pt-BR" altLang="pt-BR"/>
           </a:p>
@@ -3595,7 +1115,7 @@
             </a:pPr>
             <a:fld id="{954EE6EC-1525-4423-A8D4-82B9DF5BF7ED}" type="datetimeFigureOut">
               <a:rPr lang="pt-BR" altLang="pt-BR"/>
-              <a:t>09/09/2026</a:t>
+              <a:t>15/09/2026</a:t>
             </a:fld>
             <a:endParaRPr lang="pt-BR" altLang="pt-BR"/>
           </a:p>
@@ -3789,7 +1309,7 @@
             </a:pPr>
             <a:fld id="{BA2F35B1-1408-4DD7-84DE-79FAEF80B932}" type="datetimeFigureOut">
               <a:rPr lang="pt-BR" altLang="pt-BR"/>
-              <a:t>09/09/2026</a:t>
+              <a:t>15/09/2026</a:t>
             </a:fld>
             <a:endParaRPr lang="pt-BR" altLang="pt-BR"/>
           </a:p>
@@ -3973,7 +1493,7 @@
             </a:pPr>
             <a:fld id="{D492F7D1-0405-42EE-ACB5-97F5B85A7B86}" type="datetimeFigureOut">
               <a:rPr lang="pt-BR" altLang="pt-BR"/>
-              <a:t>09/09/2026</a:t>
+              <a:t>15/09/2026</a:t>
             </a:fld>
             <a:endParaRPr lang="pt-BR" altLang="pt-BR"/>
           </a:p>
@@ -4234,7 +1754,7 @@
             </a:pPr>
             <a:fld id="{E8B227FD-2D5D-4278-8F15-0E483FE2EC43}" type="datetimeFigureOut">
               <a:rPr lang="pt-BR" altLang="pt-BR"/>
-              <a:t>09/09/2026</a:t>
+              <a:t>15/09/2026</a:t>
             </a:fld>
             <a:endParaRPr lang="pt-BR" altLang="pt-BR"/>
           </a:p>
@@ -4535,7 +2055,7 @@
             </a:pPr>
             <a:fld id="{0B52793D-877F-4D63-AA58-5607ED782E45}" type="datetimeFigureOut">
               <a:rPr lang="pt-BR" altLang="pt-BR"/>
-              <a:t>09/09/2026</a:t>
+              <a:t>15/09/2026</a:t>
             </a:fld>
             <a:endParaRPr lang="pt-BR" altLang="pt-BR"/>
           </a:p>
@@ -4975,7 +2495,7 @@
             </a:pPr>
             <a:fld id="{A74B865E-3EBC-4265-B375-EEF8F6FBC1A2}" type="datetimeFigureOut">
               <a:rPr lang="pt-BR" altLang="pt-BR"/>
-              <a:t>09/09/2026</a:t>
+              <a:t>15/09/2026</a:t>
             </a:fld>
             <a:endParaRPr lang="pt-BR" altLang="pt-BR"/>
           </a:p>
@@ -5108,7 +2628,7 @@
             </a:pPr>
             <a:fld id="{1CC77728-1E53-4CEC-98BE-EDFDF33A066A}" type="datetimeFigureOut">
               <a:rPr lang="pt-BR" altLang="pt-BR"/>
-              <a:t>09/09/2026</a:t>
+              <a:t>15/09/2026</a:t>
             </a:fld>
             <a:endParaRPr lang="pt-BR" altLang="pt-BR"/>
           </a:p>
@@ -5219,7 +2739,7 @@
             </a:pPr>
             <a:fld id="{DAAEFA4B-8D63-4C75-8413-34904A565DF0}" type="datetimeFigureOut">
               <a:rPr lang="pt-BR" altLang="pt-BR"/>
-              <a:t>09/09/2026</a:t>
+              <a:t>15/09/2026</a:t>
             </a:fld>
             <a:endParaRPr lang="pt-BR" altLang="pt-BR"/>
           </a:p>
@@ -5510,7 +3030,7 @@
             </a:pPr>
             <a:fld id="{3A3DAC36-816A-41A8-B2AA-21E73DA6278B}" type="datetimeFigureOut">
               <a:rPr lang="pt-BR" altLang="pt-BR"/>
-              <a:t>09/09/2026</a:t>
+              <a:t>15/09/2026</a:t>
             </a:fld>
             <a:endParaRPr lang="pt-BR" altLang="pt-BR"/>
           </a:p>
@@ -5781,7 +3301,7 @@
             </a:pPr>
             <a:fld id="{1ECE69EE-2AF6-4968-84E0-1B7AF7E95915}" type="datetimeFigureOut">
               <a:rPr lang="pt-BR" altLang="pt-BR"/>
-              <a:t>09/09/2026</a:t>
+              <a:t>15/09/2026</a:t>
             </a:fld>
             <a:endParaRPr lang="pt-BR" altLang="pt-BR"/>
           </a:p>
@@ -6045,7 +3565,7 @@
             </a:pPr>
             <a:fld id="{FC6A291B-ECA8-4045-8E11-DF4FD6062A15}" type="datetimeFigureOut">
               <a:rPr lang="pt-BR" altLang="pt-BR"/>
-              <a:t>09/09/2026</a:t>
+              <a:t>15/09/2026</a:t>
             </a:fld>
             <a:endParaRPr lang="pt-BR" altLang="pt-BR"/>
           </a:p>
@@ -7886,7 +5406,7 @@
       </p:sp>
       <p:sp>
         <p:nvSpPr>
-          <p:cNvPr id="16" name="CaixaDeTexto 15"/>
+          <p:cNvPr id="10" name="CaixaDeTexto 15"/>
           <p:cNvSpPr txBox="1"/>
           <p:nvPr/>
         </p:nvSpPr>
@@ -7922,7 +5442,7 @@
         </p:nvSpPr>
         <p:spPr>
           <a:xfrm>
-            <a:off x="17064163" y="7200000"/>
+            <a:off x="19185571" y="7056611"/>
             <a:ext cx="10657184" cy="507831"/>
           </a:xfrm>
           <a:prstGeom prst="rect">
@@ -7948,7 +5468,112 @@
                 <a:latin typeface="Arial" panose="020B0604020202020204"/>
                 <a:ea typeface="Times New Roman" panose="02020603050405020304"/>
               </a:rPr>
-              <a:t>Figura 2 - Arquitetura do servidor: banco de dados (tabelas de escola, usuário e função) e autenticação.</a:t>
+              <a:t>Figura</a:t>
+            </a:r>
+            <a:r>
+              <a:rPr sz="2700" dirty="0">
+                <a:latin typeface="Arial" panose="020B0604020202020204"/>
+                <a:ea typeface="Times New Roman" panose="02020603050405020304"/>
+              </a:rPr>
+              <a:t> 2 - </a:t>
+            </a:r>
+            <a:r>
+              <a:rPr sz="2700" dirty="0" err="1">
+                <a:latin typeface="Arial" panose="020B0604020202020204"/>
+                <a:ea typeface="Times New Roman" panose="02020603050405020304"/>
+              </a:rPr>
+              <a:t>Arquitetura</a:t>
+            </a:r>
+            <a:r>
+              <a:rPr sz="2700" dirty="0">
+                <a:latin typeface="Arial" panose="020B0604020202020204"/>
+                <a:ea typeface="Times New Roman" panose="02020603050405020304"/>
+              </a:rPr>
+              <a:t> do </a:t>
+            </a:r>
+            <a:r>
+              <a:rPr sz="2700" dirty="0" err="1">
+                <a:latin typeface="Arial" panose="020B0604020202020204"/>
+                <a:ea typeface="Times New Roman" panose="02020603050405020304"/>
+              </a:rPr>
+              <a:t>servidor</a:t>
+            </a:r>
+            <a:r>
+              <a:rPr sz="2700" dirty="0">
+                <a:latin typeface="Arial" panose="020B0604020202020204"/>
+                <a:ea typeface="Times New Roman" panose="02020603050405020304"/>
+              </a:rPr>
+              <a:t>: banco de dados (</a:t>
+            </a:r>
+            <a:r>
+              <a:rPr sz="2700" dirty="0" err="1">
+                <a:latin typeface="Arial" panose="020B0604020202020204"/>
+                <a:ea typeface="Times New Roman" panose="02020603050405020304"/>
+              </a:rPr>
+              <a:t>tabelas</a:t>
+            </a:r>
+            <a:r>
+              <a:rPr sz="2700" dirty="0">
+                <a:latin typeface="Arial" panose="020B0604020202020204"/>
+                <a:ea typeface="Times New Roman" panose="02020603050405020304"/>
+              </a:rPr>
+              <a:t> de </a:t>
+            </a:r>
+            <a:r>
+              <a:rPr sz="2700" dirty="0" err="1">
+                <a:latin typeface="Arial" panose="020B0604020202020204"/>
+                <a:ea typeface="Times New Roman" panose="02020603050405020304"/>
+              </a:rPr>
+              <a:t>escola</a:t>
+            </a:r>
+            <a:r>
+              <a:rPr sz="2700" dirty="0">
+                <a:latin typeface="Arial" panose="020B0604020202020204"/>
+                <a:ea typeface="Times New Roman" panose="02020603050405020304"/>
+              </a:rPr>
+              <a:t>, </a:t>
+            </a:r>
+            <a:r>
+              <a:rPr sz="2700" dirty="0" err="1">
+                <a:latin typeface="Arial" panose="020B0604020202020204"/>
+                <a:ea typeface="Times New Roman" panose="02020603050405020304"/>
+              </a:rPr>
+              <a:t>usuário</a:t>
+            </a:r>
+            <a:r>
+              <a:rPr sz="2700" dirty="0">
+                <a:latin typeface="Arial" panose="020B0604020202020204"/>
+                <a:ea typeface="Times New Roman" panose="02020603050405020304"/>
+              </a:rPr>
+              <a:t> e </a:t>
+            </a:r>
+            <a:r>
+              <a:rPr sz="2700" dirty="0" err="1">
+                <a:latin typeface="Arial" panose="020B0604020202020204"/>
+                <a:ea typeface="Times New Roman" panose="02020603050405020304"/>
+              </a:rPr>
+              <a:t>função</a:t>
+            </a:r>
+            <a:r>
+              <a:rPr sz="2700" dirty="0">
+                <a:latin typeface="Arial" panose="020B0604020202020204"/>
+                <a:ea typeface="Times New Roman" panose="02020603050405020304"/>
+              </a:rPr>
+              <a:t>) e </a:t>
+            </a:r>
+            <a:r>
+              <a:rPr sz="2700" dirty="0" err="1">
+                <a:latin typeface="Arial" panose="020B0604020202020204"/>
+                <a:ea typeface="Times New Roman" panose="02020603050405020304"/>
+              </a:rPr>
+              <a:t>autenticação</a:t>
+            </a:r>
+            <a:r>
+              <a:rPr sz="2700" dirty="0">
+                <a:latin typeface="Arial" panose="020B0604020202020204"/>
+                <a:ea typeface="Times New Roman" panose="02020603050405020304"/>
+              </a:rPr>
+              <a:t>.</a:t>
             </a:r>
           </a:p>
         </p:txBody>
@@ -8061,7 +5686,7 @@
           <p:nvPr/>
         </p:nvPicPr>
         <p:blipFill>
-          <a:blip r:embed="rId10"/>
+          <a:blip r:embed="rId6"/>
           <a:stretch>
             <a:fillRect/>
           </a:stretch>
@@ -8085,7 +5710,7 @@
           <p:nvPr/>
         </p:nvPicPr>
         <p:blipFill>
-          <a:blip r:embed="rId8"/>
+          <a:blip r:embed="rId7"/>
           <a:stretch>
             <a:fillRect/>
           </a:stretch>
@@ -8109,7 +5734,7 @@
           <p:nvPr/>
         </p:nvPicPr>
         <p:blipFill>
-          <a:blip r:embed="rId11"/>
+          <a:blip r:embed="rId8"/>
           <a:stretch>
             <a:fillRect/>
           </a:stretch>
